--- a/output/doc/user-flow-decks/06-field-rep-registration-and-login.pptx
+++ b/output/doc/user-flow-decks/06-field-rep-registration-and-login.pptx
@@ -13,6 +13,7 @@
     <p:sldId id="261" r:id="rId12"/>
     <p:sldId id="262" r:id="rId13"/>
     <p:sldId id="263" r:id="rId14"/>
+    <p:sldId id="264" r:id="rId15"/>
   </p:sldIdLst>
   <p:sldSz cx="12191695" cy="6858000" type="screen4x3"/>
   <p:notesSz cx="6858000" cy="9144000"/>
@@ -3213,7 +3214,7 @@
                 </a:solidFill>
                 <a:latin typeface="Aptos"/>
               </a:rPr>
-              <a:t>Explain the current public field-rep access screens, including the legacy compatibility redirects, the password login page, and the active Gmail/manual or SSO login path.</a:t>
+              <a:t>Explain the current public field-rep access screens, including the legacy compatibility redirects, the password login and recovery screens, and the active Gmail/manual or SSO login path.</a:t>
             </a:r>
           </a:p>
         </p:txBody>
@@ -4020,7 +4021,7 @@
                 </a:solidFill>
                 <a:latin typeface="Aptos"/>
               </a:rPr>
-              <a:t>Explain the current public field-rep access screens, including the legacy compatibility redirects, the password login page, and the active Gmail/manual or SSO login path.</a:t>
+              <a:t>Explain the current public field-rep access screens, including the legacy compatibility redirects, the password login and recovery screens, and the active Gmail/manual or SSO login path.</a:t>
             </a:r>
           </a:p>
         </p:txBody>
@@ -4148,6 +4149,18 @@
                 <a:latin typeface="Aptos"/>
               </a:rPr>
               <a:t>The product still supports both email/password login and Brand Specific Field ID plus Email ID login patterns.</a:t>
+            </a:r>
+          </a:p>
+          <a:p>
+            <a:pPr algn="l"/>
+            <a:r>
+              <a:rPr sz="1800">
+                <a:solidFill>
+                  <a:srgbClr val="102A43"/>
+                </a:solidFill>
+                <a:latin typeface="Aptos"/>
+              </a:rPr>
+              <a:t>Password recovery is still live through the forgot-password and reset-password flow backed by the rep's configured security question.</a:t>
             </a:r>
           </a:p>
           <a:p>
@@ -4463,7 +4476,7 @@
         <p:spPr>
           <a:xfrm>
             <a:off x="749808" y="1097280"/>
-            <a:ext cx="4023360" cy="256032"/>
+            <a:ext cx="3931920" cy="4754880"/>
           </a:xfrm>
           <a:prstGeom prst="rect">
             <a:avLst/>
@@ -4471,12 +4484,19 @@
           <a:noFill/>
         </p:spPr>
         <p:txBody>
-          <a:bodyPr wrap="square" anchor="t">
+          <a:bodyPr wrap="square" lIns="0" rIns="0" tIns="0" bIns="0">
             <a:spAutoFit/>
           </a:bodyPr>
           <a:lstStyle/>
           <a:p>
-            <a:pPr algn="l"/>
+            <a:pPr algn="l">
+              <a:spcBef>
+                <a:spcPts val="0"/>
+              </a:spcBef>
+              <a:spcAft>
+                <a:spcPts val="200"/>
+              </a:spcAft>
+            </a:pPr>
             <a:r>
               <a:rPr sz="1200" b="1">
                 <a:solidFill>
@@ -4487,33 +4507,20 @@
               <a:t>User action</a:t>
             </a:r>
           </a:p>
-        </p:txBody>
-      </p:sp>
-      <p:sp>
-        <p:nvSpPr>
-          <p:cNvPr id="8" name="TextBox 7"/>
-          <p:cNvSpPr txBox="1"/>
-          <p:nvPr/>
-        </p:nvSpPr>
-        <p:spPr>
-          <a:xfrm>
-            <a:off x="749808" y="1353312"/>
-            <a:ext cx="3931920" cy="621792"/>
-          </a:xfrm>
-          <a:prstGeom prst="rect">
-            <a:avLst/>
-          </a:prstGeom>
-          <a:noFill/>
-        </p:spPr>
-        <p:txBody>
-          <a:bodyPr wrap="square" anchor="t">
-            <a:spAutoFit/>
-          </a:bodyPr>
-          <a:lstStyle/>
-          <a:p>
-            <a:pPr algn="l"/>
-            <a:r>
-              <a:rPr sz="1600" b="0">
+          <a:p>
+            <a:pPr algn="l">
+              <a:lnSpc>
+                <a:spcPct val="110000"/>
+              </a:lnSpc>
+              <a:spcBef>
+                <a:spcPts val="0"/>
+              </a:spcBef>
+              <a:spcAft>
+                <a:spcPts val="800"/>
+              </a:spcAft>
+            </a:pPr>
+            <a:r>
+              <a:rPr sz="1300">
                 <a:solidFill>
                   <a:srgbClr val="102A43"/>
                 </a:solidFill>
@@ -4522,31 +4529,15 @@
               <a:t>Launch the campaign-scoped registration URL that older launch materials may still reference.</a:t>
             </a:r>
           </a:p>
-        </p:txBody>
-      </p:sp>
-      <p:sp>
-        <p:nvSpPr>
-          <p:cNvPr id="9" name="TextBox 8"/>
-          <p:cNvSpPr txBox="1"/>
-          <p:nvPr/>
-        </p:nvSpPr>
-        <p:spPr>
-          <a:xfrm>
-            <a:off x="749808" y="2011680"/>
-            <a:ext cx="4023360" cy="256032"/>
-          </a:xfrm>
-          <a:prstGeom prst="rect">
-            <a:avLst/>
-          </a:prstGeom>
-          <a:noFill/>
-        </p:spPr>
-        <p:txBody>
-          <a:bodyPr wrap="square" anchor="t">
-            <a:spAutoFit/>
-          </a:bodyPr>
-          <a:lstStyle/>
-          <a:p>
-            <a:pPr algn="l"/>
+          <a:p>
+            <a:pPr algn="l">
+              <a:spcBef>
+                <a:spcPts val="0"/>
+              </a:spcBef>
+              <a:spcAft>
+                <a:spcPts val="200"/>
+              </a:spcAft>
+            </a:pPr>
             <a:r>
               <a:rPr sz="1200" b="1">
                 <a:solidFill>
@@ -4557,33 +4548,20 @@
               <a:t>What appears on screen</a:t>
             </a:r>
           </a:p>
-        </p:txBody>
-      </p:sp>
-      <p:sp>
-        <p:nvSpPr>
-          <p:cNvPr id="10" name="TextBox 9"/>
-          <p:cNvSpPr txBox="1"/>
-          <p:nvPr/>
-        </p:nvSpPr>
-        <p:spPr>
-          <a:xfrm>
-            <a:off x="749808" y="2267712"/>
-            <a:ext cx="3931920" cy="713232"/>
-          </a:xfrm>
-          <a:prstGeom prst="rect">
-            <a:avLst/>
-          </a:prstGeom>
-          <a:noFill/>
-        </p:spPr>
-        <p:txBody>
-          <a:bodyPr wrap="square" anchor="t">
-            <a:spAutoFit/>
-          </a:bodyPr>
-          <a:lstStyle/>
-          <a:p>
-            <a:pPr algn="l"/>
-            <a:r>
-              <a:rPr sz="1600" b="0">
+          <a:p>
+            <a:pPr algn="l">
+              <a:lnSpc>
+                <a:spcPct val="110000"/>
+              </a:lnSpc>
+              <a:spcBef>
+                <a:spcPts val="0"/>
+              </a:spcBef>
+              <a:spcAft>
+                <a:spcPts val="800"/>
+              </a:spcAft>
+            </a:pPr>
+            <a:r>
+              <a:rPr sz="1300">
                 <a:solidFill>
                   <a:srgbClr val="102A43"/>
                 </a:solidFill>
@@ -4592,31 +4570,15 @@
               <a:t>The Gmail/manual login page with an info banner stating that Field Rep registration is no longer required.</a:t>
             </a:r>
           </a:p>
-        </p:txBody>
-      </p:sp>
-      <p:sp>
-        <p:nvSpPr>
-          <p:cNvPr id="11" name="TextBox 10"/>
-          <p:cNvSpPr txBox="1"/>
-          <p:nvPr/>
-        </p:nvSpPr>
-        <p:spPr>
-          <a:xfrm>
-            <a:off x="749808" y="3063240"/>
-            <a:ext cx="4023360" cy="256032"/>
-          </a:xfrm>
-          <a:prstGeom prst="rect">
-            <a:avLst/>
-          </a:prstGeom>
-          <a:noFill/>
-        </p:spPr>
-        <p:txBody>
-          <a:bodyPr wrap="square" anchor="t">
-            <a:spAutoFit/>
-          </a:bodyPr>
-          <a:lstStyle/>
-          <a:p>
-            <a:pPr algn="l"/>
+          <a:p>
+            <a:pPr algn="l">
+              <a:spcBef>
+                <a:spcPts val="0"/>
+              </a:spcBef>
+              <a:spcAft>
+                <a:spcPts val="200"/>
+              </a:spcAft>
+            </a:pPr>
             <a:r>
               <a:rPr sz="1200" b="1">
                 <a:solidFill>
@@ -4627,33 +4589,20 @@
               <a:t>Why it matters</a:t>
             </a:r>
           </a:p>
-        </p:txBody>
-      </p:sp>
-      <p:sp>
-        <p:nvSpPr>
-          <p:cNvPr id="12" name="TextBox 11"/>
-          <p:cNvSpPr txBox="1"/>
-          <p:nvPr/>
-        </p:nvSpPr>
-        <p:spPr>
-          <a:xfrm>
-            <a:off x="749808" y="3319272"/>
-            <a:ext cx="3931920" cy="640080"/>
-          </a:xfrm>
-          <a:prstGeom prst="rect">
-            <a:avLst/>
-          </a:prstGeom>
-          <a:noFill/>
-        </p:spPr>
-        <p:txBody>
-          <a:bodyPr wrap="square" anchor="t">
-            <a:spAutoFit/>
-          </a:bodyPr>
-          <a:lstStyle/>
-          <a:p>
-            <a:pPr algn="l"/>
-            <a:r>
-              <a:rPr sz="1500" b="0">
+          <a:p>
+            <a:pPr algn="l">
+              <a:lnSpc>
+                <a:spcPct val="110000"/>
+              </a:lnSpc>
+              <a:spcBef>
+                <a:spcPts val="0"/>
+              </a:spcBef>
+              <a:spcAft>
+                <a:spcPts val="800"/>
+              </a:spcAft>
+            </a:pPr>
+            <a:r>
+              <a:rPr sz="1300">
                 <a:solidFill>
                   <a:srgbClr val="102A43"/>
                 </a:solidFill>
@@ -4662,31 +4611,15 @@
               <a:t>This explains the current product behavior when older documentation or bookmarks still point to the registration route.</a:t>
             </a:r>
           </a:p>
-        </p:txBody>
-      </p:sp>
-      <p:sp>
-        <p:nvSpPr>
-          <p:cNvPr id="13" name="TextBox 12"/>
-          <p:cNvSpPr txBox="1"/>
-          <p:nvPr/>
-        </p:nvSpPr>
-        <p:spPr>
-          <a:xfrm>
-            <a:off x="749808" y="4069080"/>
-            <a:ext cx="4023360" cy="256032"/>
-          </a:xfrm>
-          <a:prstGeom prst="rect">
-            <a:avLst/>
-          </a:prstGeom>
-          <a:noFill/>
-        </p:spPr>
-        <p:txBody>
-          <a:bodyPr wrap="square" anchor="t">
-            <a:spAutoFit/>
-          </a:bodyPr>
-          <a:lstStyle/>
-          <a:p>
-            <a:pPr algn="l"/>
+          <a:p>
+            <a:pPr algn="l">
+              <a:spcBef>
+                <a:spcPts val="0"/>
+              </a:spcBef>
+              <a:spcAft>
+                <a:spcPts val="200"/>
+              </a:spcAft>
+            </a:pPr>
             <a:r>
               <a:rPr sz="1200" b="1">
                 <a:solidFill>
@@ -4697,33 +4630,20 @@
               <a:t>Expected result</a:t>
             </a:r>
           </a:p>
-        </p:txBody>
-      </p:sp>
-      <p:sp>
-        <p:nvSpPr>
-          <p:cNvPr id="14" name="TextBox 13"/>
-          <p:cNvSpPr txBox="1"/>
-          <p:nvPr/>
-        </p:nvSpPr>
-        <p:spPr>
-          <a:xfrm>
-            <a:off x="749808" y="4325112"/>
-            <a:ext cx="3931920" cy="566928"/>
-          </a:xfrm>
-          <a:prstGeom prst="rect">
-            <a:avLst/>
-          </a:prstGeom>
-          <a:noFill/>
-        </p:spPr>
-        <p:txBody>
-          <a:bodyPr wrap="square" anchor="t">
-            <a:spAutoFit/>
-          </a:bodyPr>
-          <a:lstStyle/>
-          <a:p>
-            <a:pPr algn="l"/>
-            <a:r>
-              <a:rPr sz="1500" b="0">
+          <a:p>
+            <a:pPr algn="l">
+              <a:lnSpc>
+                <a:spcPct val="110000"/>
+              </a:lnSpc>
+              <a:spcBef>
+                <a:spcPts val="0"/>
+              </a:spcBef>
+              <a:spcAft>
+                <a:spcPts val="800"/>
+              </a:spcAft>
+            </a:pPr>
+            <a:r>
+              <a:rPr sz="1300">
                 <a:solidFill>
                   <a:srgbClr val="102A43"/>
                 </a:solidFill>
@@ -4732,31 +4652,15 @@
               <a:t>The rep lands on the active login surface instead of a self-service sign-up form.</a:t>
             </a:r>
           </a:p>
-        </p:txBody>
-      </p:sp>
-      <p:sp>
-        <p:nvSpPr>
-          <p:cNvPr id="15" name="TextBox 14"/>
-          <p:cNvSpPr txBox="1"/>
-          <p:nvPr/>
-        </p:nvSpPr>
-        <p:spPr>
-          <a:xfrm>
-            <a:off x="749808" y="4965192"/>
-            <a:ext cx="4023360" cy="256032"/>
-          </a:xfrm>
-          <a:prstGeom prst="rect">
-            <a:avLst/>
-          </a:prstGeom>
-          <a:noFill/>
-        </p:spPr>
-        <p:txBody>
-          <a:bodyPr wrap="square" anchor="t">
-            <a:spAutoFit/>
-          </a:bodyPr>
-          <a:lstStyle/>
-          <a:p>
-            <a:pPr algn="l"/>
+          <a:p>
+            <a:pPr algn="l">
+              <a:spcBef>
+                <a:spcPts val="0"/>
+              </a:spcBef>
+              <a:spcAft>
+                <a:spcPts val="200"/>
+              </a:spcAft>
+            </a:pPr>
             <a:r>
               <a:rPr sz="1200" b="1">
                 <a:solidFill>
@@ -4767,33 +4671,20 @@
               <a:t>Trainer note</a:t>
             </a:r>
           </a:p>
-        </p:txBody>
-      </p:sp>
-      <p:sp>
-        <p:nvSpPr>
-          <p:cNvPr id="16" name="TextBox 15"/>
-          <p:cNvSpPr txBox="1"/>
-          <p:nvPr/>
-        </p:nvSpPr>
-        <p:spPr>
-          <a:xfrm>
-            <a:off x="749808" y="5212080"/>
-            <a:ext cx="3931920" cy="640080"/>
-          </a:xfrm>
-          <a:prstGeom prst="rect">
-            <a:avLst/>
-          </a:prstGeom>
-          <a:noFill/>
-        </p:spPr>
-        <p:txBody>
-          <a:bodyPr wrap="square" anchor="t">
-            <a:spAutoFit/>
-          </a:bodyPr>
-          <a:lstStyle/>
-          <a:p>
-            <a:pPr algn="l"/>
-            <a:r>
-              <a:rPr sz="1300" b="0">
+          <a:p>
+            <a:pPr algn="l">
+              <a:lnSpc>
+                <a:spcPct val="110000"/>
+              </a:lnSpc>
+              <a:spcBef>
+                <a:spcPts val="0"/>
+              </a:spcBef>
+              <a:spcAft>
+                <a:spcPts val="0"/>
+              </a:spcAft>
+            </a:pPr>
+            <a:r>
+              <a:rPr sz="1200">
                 <a:solidFill>
                   <a:srgbClr val="52667A"/>
                 </a:solidFill>
@@ -4806,7 +4697,7 @@
       </p:sp>
       <p:sp>
         <p:nvSpPr>
-          <p:cNvPr id="17" name="Rounded Rectangle 16"/>
+          <p:cNvPr id="8" name="Rounded Rectangle 7"/>
           <p:cNvSpPr/>
           <p:nvPr/>
         </p:nvSpPr>
@@ -4851,7 +4742,7 @@
       </p:sp>
       <p:sp>
         <p:nvSpPr>
-          <p:cNvPr id="18" name="TextBox 17"/>
+          <p:cNvPr id="9" name="TextBox 8"/>
           <p:cNvSpPr txBox="1"/>
           <p:nvPr/>
         </p:nvSpPr>
@@ -4886,7 +4777,7 @@
       </p:sp>
       <p:pic>
         <p:nvPicPr>
-          <p:cNvPr id="19" name="Picture 18" descr="fieldrep-register.png"/>
+          <p:cNvPr id="10" name="Picture 9" descr="fieldrep-register.png"/>
           <p:cNvPicPr>
             <a:picLocks noChangeAspect="1"/>
           </p:cNvPicPr>
@@ -4910,7 +4801,7 @@
       </p:pic>
       <p:sp>
         <p:nvSpPr>
-          <p:cNvPr id="20" name="TextBox 19"/>
+          <p:cNvPr id="11" name="TextBox 10"/>
           <p:cNvSpPr txBox="1"/>
           <p:nvPr/>
         </p:nvSpPr>
@@ -4945,7 +4836,7 @@
       </p:sp>
       <p:sp>
         <p:nvSpPr>
-          <p:cNvPr id="21" name="TextBox 20"/>
+          <p:cNvPr id="12" name="TextBox 11"/>
           <p:cNvSpPr txBox="1"/>
           <p:nvPr/>
         </p:nvSpPr>
@@ -5218,7 +5109,7 @@
         <p:spPr>
           <a:xfrm>
             <a:off x="749808" y="1097280"/>
-            <a:ext cx="4023360" cy="256032"/>
+            <a:ext cx="3931920" cy="4754880"/>
           </a:xfrm>
           <a:prstGeom prst="rect">
             <a:avLst/>
@@ -5226,12 +5117,19 @@
           <a:noFill/>
         </p:spPr>
         <p:txBody>
-          <a:bodyPr wrap="square" anchor="t">
+          <a:bodyPr wrap="square" lIns="0" rIns="0" tIns="0" bIns="0">
             <a:spAutoFit/>
           </a:bodyPr>
           <a:lstStyle/>
           <a:p>
-            <a:pPr algn="l"/>
+            <a:pPr algn="l">
+              <a:spcBef>
+                <a:spcPts val="0"/>
+              </a:spcBef>
+              <a:spcAft>
+                <a:spcPts val="200"/>
+              </a:spcAft>
+            </a:pPr>
             <a:r>
               <a:rPr sz="1200" b="1">
                 <a:solidFill>
@@ -5242,33 +5140,20 @@
               <a:t>User action</a:t>
             </a:r>
           </a:p>
-        </p:txBody>
-      </p:sp>
-      <p:sp>
-        <p:nvSpPr>
-          <p:cNvPr id="8" name="TextBox 7"/>
-          <p:cNvSpPr txBox="1"/>
-          <p:nvPr/>
-        </p:nvSpPr>
-        <p:spPr>
-          <a:xfrm>
-            <a:off x="749808" y="1353312"/>
-            <a:ext cx="3931920" cy="621792"/>
-          </a:xfrm>
-          <a:prstGeom prst="rect">
-            <a:avLst/>
-          </a:prstGeom>
-          <a:noFill/>
-        </p:spPr>
-        <p:txBody>
-          <a:bodyPr wrap="square" anchor="t">
-            <a:spAutoFit/>
-          </a:bodyPr>
-          <a:lstStyle/>
-          <a:p>
-            <a:pPr algn="l"/>
-            <a:r>
-              <a:rPr sz="1600" b="0">
+          <a:p>
+            <a:pPr algn="l">
+              <a:lnSpc>
+                <a:spcPct val="110000"/>
+              </a:lnSpc>
+              <a:spcBef>
+                <a:spcPts val="0"/>
+              </a:spcBef>
+              <a:spcAft>
+                <a:spcPts val="800"/>
+              </a:spcAft>
+            </a:pPr>
+            <a:r>
+              <a:rPr sz="1200">
                 <a:solidFill>
                   <a:srgbClr val="102A43"/>
                 </a:solidFill>
@@ -5277,31 +5162,15 @@
               <a:t>Launch the create-password URL, optionally carrying the rep email, Field ID, and campaign in the query string.</a:t>
             </a:r>
           </a:p>
-        </p:txBody>
-      </p:sp>
-      <p:sp>
-        <p:nvSpPr>
-          <p:cNvPr id="9" name="TextBox 8"/>
-          <p:cNvSpPr txBox="1"/>
-          <p:nvPr/>
-        </p:nvSpPr>
-        <p:spPr>
-          <a:xfrm>
-            <a:off x="749808" y="2011680"/>
-            <a:ext cx="4023360" cy="256032"/>
-          </a:xfrm>
-          <a:prstGeom prst="rect">
-            <a:avLst/>
-          </a:prstGeom>
-          <a:noFill/>
-        </p:spPr>
-        <p:txBody>
-          <a:bodyPr wrap="square" anchor="t">
-            <a:spAutoFit/>
-          </a:bodyPr>
-          <a:lstStyle/>
-          <a:p>
-            <a:pPr algn="l"/>
+          <a:p>
+            <a:pPr algn="l">
+              <a:spcBef>
+                <a:spcPts val="0"/>
+              </a:spcBef>
+              <a:spcAft>
+                <a:spcPts val="200"/>
+              </a:spcAft>
+            </a:pPr>
             <a:r>
               <a:rPr sz="1200" b="1">
                 <a:solidFill>
@@ -5312,33 +5181,20 @@
               <a:t>What appears on screen</a:t>
             </a:r>
           </a:p>
-        </p:txBody>
-      </p:sp>
-      <p:sp>
-        <p:nvSpPr>
-          <p:cNvPr id="10" name="TextBox 9"/>
-          <p:cNvSpPr txBox="1"/>
-          <p:nvPr/>
-        </p:nvSpPr>
-        <p:spPr>
-          <a:xfrm>
-            <a:off x="749808" y="2267712"/>
-            <a:ext cx="3931920" cy="713232"/>
-          </a:xfrm>
-          <a:prstGeom prst="rect">
-            <a:avLst/>
-          </a:prstGeom>
-          <a:noFill/>
-        </p:spPr>
-        <p:txBody>
-          <a:bodyPr wrap="square" anchor="t">
-            <a:spAutoFit/>
-          </a:bodyPr>
-          <a:lstStyle/>
-          <a:p>
-            <a:pPr algn="l"/>
-            <a:r>
-              <a:rPr sz="1600" b="0">
+          <a:p>
+            <a:pPr algn="l">
+              <a:lnSpc>
+                <a:spcPct val="110000"/>
+              </a:lnSpc>
+              <a:spcBef>
+                <a:spcPts val="0"/>
+              </a:spcBef>
+              <a:spcAft>
+                <a:spcPts val="800"/>
+              </a:spcAft>
+            </a:pPr>
+            <a:r>
+              <a:rPr sz="1200">
                 <a:solidFill>
                   <a:srgbClr val="102A43"/>
                 </a:solidFill>
@@ -5347,31 +5203,15 @@
               <a:t>The same Gmail/manual login page, usually with the email and Field ID prefilled and the same informational banner.</a:t>
             </a:r>
           </a:p>
-        </p:txBody>
-      </p:sp>
-      <p:sp>
-        <p:nvSpPr>
-          <p:cNvPr id="11" name="TextBox 10"/>
-          <p:cNvSpPr txBox="1"/>
-          <p:nvPr/>
-        </p:nvSpPr>
-        <p:spPr>
-          <a:xfrm>
-            <a:off x="749808" y="3063240"/>
-            <a:ext cx="4023360" cy="256032"/>
-          </a:xfrm>
-          <a:prstGeom prst="rect">
-            <a:avLst/>
-          </a:prstGeom>
-          <a:noFill/>
-        </p:spPr>
-        <p:txBody>
-          <a:bodyPr wrap="square" anchor="t">
-            <a:spAutoFit/>
-          </a:bodyPr>
-          <a:lstStyle/>
-          <a:p>
-            <a:pPr algn="l"/>
+          <a:p>
+            <a:pPr algn="l">
+              <a:spcBef>
+                <a:spcPts val="0"/>
+              </a:spcBef>
+              <a:spcAft>
+                <a:spcPts val="200"/>
+              </a:spcAft>
+            </a:pPr>
             <a:r>
               <a:rPr sz="1200" b="1">
                 <a:solidFill>
@@ -5382,33 +5222,20 @@
               <a:t>Why it matters</a:t>
             </a:r>
           </a:p>
-        </p:txBody>
-      </p:sp>
-      <p:sp>
-        <p:nvSpPr>
-          <p:cNvPr id="12" name="TextBox 11"/>
-          <p:cNvSpPr txBox="1"/>
-          <p:nvPr/>
-        </p:nvSpPr>
-        <p:spPr>
-          <a:xfrm>
-            <a:off x="749808" y="3319272"/>
-            <a:ext cx="3931920" cy="640080"/>
-          </a:xfrm>
-          <a:prstGeom prst="rect">
-            <a:avLst/>
-          </a:prstGeom>
-          <a:noFill/>
-        </p:spPr>
-        <p:txBody>
-          <a:bodyPr wrap="square" anchor="t">
-            <a:spAutoFit/>
-          </a:bodyPr>
-          <a:lstStyle/>
-          <a:p>
-            <a:pPr algn="l"/>
-            <a:r>
-              <a:rPr sz="1500" b="0">
+          <a:p>
+            <a:pPr algn="l">
+              <a:lnSpc>
+                <a:spcPct val="110000"/>
+              </a:lnSpc>
+              <a:spcBef>
+                <a:spcPts val="0"/>
+              </a:spcBef>
+              <a:spcAft>
+                <a:spcPts val="800"/>
+              </a:spcAft>
+            </a:pPr>
+            <a:r>
+              <a:rPr sz="1200">
                 <a:solidFill>
                   <a:srgbClr val="102A43"/>
                 </a:solidFill>
@@ -5417,31 +5244,15 @@
               <a:t>This shows how older password-setup links now preserve context while handing the rep into the supported login path.</a:t>
             </a:r>
           </a:p>
-        </p:txBody>
-      </p:sp>
-      <p:sp>
-        <p:nvSpPr>
-          <p:cNvPr id="13" name="TextBox 12"/>
-          <p:cNvSpPr txBox="1"/>
-          <p:nvPr/>
-        </p:nvSpPr>
-        <p:spPr>
-          <a:xfrm>
-            <a:off x="749808" y="4069080"/>
-            <a:ext cx="4023360" cy="256032"/>
-          </a:xfrm>
-          <a:prstGeom prst="rect">
-            <a:avLst/>
-          </a:prstGeom>
-          <a:noFill/>
-        </p:spPr>
-        <p:txBody>
-          <a:bodyPr wrap="square" anchor="t">
-            <a:spAutoFit/>
-          </a:bodyPr>
-          <a:lstStyle/>
-          <a:p>
-            <a:pPr algn="l"/>
+          <a:p>
+            <a:pPr algn="l">
+              <a:spcBef>
+                <a:spcPts val="0"/>
+              </a:spcBef>
+              <a:spcAft>
+                <a:spcPts val="200"/>
+              </a:spcAft>
+            </a:pPr>
             <a:r>
               <a:rPr sz="1200" b="1">
                 <a:solidFill>
@@ -5452,33 +5263,20 @@
               <a:t>Expected result</a:t>
             </a:r>
           </a:p>
-        </p:txBody>
-      </p:sp>
-      <p:sp>
-        <p:nvSpPr>
-          <p:cNvPr id="14" name="TextBox 13"/>
-          <p:cNvSpPr txBox="1"/>
-          <p:nvPr/>
-        </p:nvSpPr>
-        <p:spPr>
-          <a:xfrm>
-            <a:off x="749808" y="4325112"/>
-            <a:ext cx="3931920" cy="566928"/>
-          </a:xfrm>
-          <a:prstGeom prst="rect">
-            <a:avLst/>
-          </a:prstGeom>
-          <a:noFill/>
-        </p:spPr>
-        <p:txBody>
-          <a:bodyPr wrap="square" anchor="t">
-            <a:spAutoFit/>
-          </a:bodyPr>
-          <a:lstStyle/>
-          <a:p>
-            <a:pPr algn="l"/>
-            <a:r>
-              <a:rPr sz="1500" b="0">
+          <a:p>
+            <a:pPr algn="l">
+              <a:lnSpc>
+                <a:spcPct val="110000"/>
+              </a:lnSpc>
+              <a:spcBef>
+                <a:spcPts val="0"/>
+              </a:spcBef>
+              <a:spcAft>
+                <a:spcPts val="800"/>
+              </a:spcAft>
+            </a:pPr>
+            <a:r>
+              <a:rPr sz="1200">
                 <a:solidFill>
                   <a:srgbClr val="102A43"/>
                 </a:solidFill>
@@ -5487,31 +5285,15 @@
               <a:t>The rep can continue with the current login flow without losing the campaign or identifier context.</a:t>
             </a:r>
           </a:p>
-        </p:txBody>
-      </p:sp>
-      <p:sp>
-        <p:nvSpPr>
-          <p:cNvPr id="15" name="TextBox 14"/>
-          <p:cNvSpPr txBox="1"/>
-          <p:nvPr/>
-        </p:nvSpPr>
-        <p:spPr>
-          <a:xfrm>
-            <a:off x="749808" y="4965192"/>
-            <a:ext cx="4023360" cy="256032"/>
-          </a:xfrm>
-          <a:prstGeom prst="rect">
-            <a:avLst/>
-          </a:prstGeom>
-          <a:noFill/>
-        </p:spPr>
-        <p:txBody>
-          <a:bodyPr wrap="square" anchor="t">
-            <a:spAutoFit/>
-          </a:bodyPr>
-          <a:lstStyle/>
-          <a:p>
-            <a:pPr algn="l"/>
+          <a:p>
+            <a:pPr algn="l">
+              <a:spcBef>
+                <a:spcPts val="0"/>
+              </a:spcBef>
+              <a:spcAft>
+                <a:spcPts val="200"/>
+              </a:spcAft>
+            </a:pPr>
             <a:r>
               <a:rPr sz="1200" b="1">
                 <a:solidFill>
@@ -5522,33 +5304,20 @@
               <a:t>Trainer note</a:t>
             </a:r>
           </a:p>
-        </p:txBody>
-      </p:sp>
-      <p:sp>
-        <p:nvSpPr>
-          <p:cNvPr id="16" name="TextBox 15"/>
-          <p:cNvSpPr txBox="1"/>
-          <p:nvPr/>
-        </p:nvSpPr>
-        <p:spPr>
-          <a:xfrm>
-            <a:off x="749808" y="5212080"/>
-            <a:ext cx="3931920" cy="640080"/>
-          </a:xfrm>
-          <a:prstGeom prst="rect">
-            <a:avLst/>
-          </a:prstGeom>
-          <a:noFill/>
-        </p:spPr>
-        <p:txBody>
-          <a:bodyPr wrap="square" anchor="t">
-            <a:spAutoFit/>
-          </a:bodyPr>
-          <a:lstStyle/>
-          <a:p>
-            <a:pPr algn="l"/>
-            <a:r>
-              <a:rPr sz="1300" b="0">
+          <a:p>
+            <a:pPr algn="l">
+              <a:lnSpc>
+                <a:spcPct val="110000"/>
+              </a:lnSpc>
+              <a:spcBef>
+                <a:spcPts val="0"/>
+              </a:spcBef>
+              <a:spcAft>
+                <a:spcPts val="0"/>
+              </a:spcAft>
+            </a:pPr>
+            <a:r>
+              <a:rPr sz="1100">
                 <a:solidFill>
                   <a:srgbClr val="52667A"/>
                 </a:solidFill>
@@ -5561,7 +5330,7 @@
       </p:sp>
       <p:sp>
         <p:nvSpPr>
-          <p:cNvPr id="17" name="Rounded Rectangle 16"/>
+          <p:cNvPr id="8" name="Rounded Rectangle 7"/>
           <p:cNvSpPr/>
           <p:nvPr/>
         </p:nvSpPr>
@@ -5606,7 +5375,7 @@
       </p:sp>
       <p:sp>
         <p:nvSpPr>
-          <p:cNvPr id="18" name="TextBox 17"/>
+          <p:cNvPr id="9" name="TextBox 8"/>
           <p:cNvSpPr txBox="1"/>
           <p:nvPr/>
         </p:nvSpPr>
@@ -5641,7 +5410,7 @@
       </p:sp>
       <p:pic>
         <p:nvPicPr>
-          <p:cNvPr id="19" name="Picture 18" descr="fieldrep-create-password.png"/>
+          <p:cNvPr id="10" name="Picture 9" descr="fieldrep-create-password.png"/>
           <p:cNvPicPr>
             <a:picLocks noChangeAspect="1"/>
           </p:cNvPicPr>
@@ -5665,7 +5434,7 @@
       </p:pic>
       <p:sp>
         <p:nvSpPr>
-          <p:cNvPr id="20" name="TextBox 19"/>
+          <p:cNvPr id="11" name="TextBox 10"/>
           <p:cNvSpPr txBox="1"/>
           <p:nvPr/>
         </p:nvSpPr>
@@ -5700,7 +5469,7 @@
       </p:sp>
       <p:sp>
         <p:nvSpPr>
-          <p:cNvPr id="21" name="TextBox 20"/>
+          <p:cNvPr id="12" name="TextBox 11"/>
           <p:cNvSpPr txBox="1"/>
           <p:nvPr/>
         </p:nvSpPr>
@@ -5973,7 +5742,7 @@
         <p:spPr>
           <a:xfrm>
             <a:off x="749808" y="1097280"/>
-            <a:ext cx="4023360" cy="256032"/>
+            <a:ext cx="3931920" cy="4754880"/>
           </a:xfrm>
           <a:prstGeom prst="rect">
             <a:avLst/>
@@ -5981,12 +5750,19 @@
           <a:noFill/>
         </p:spPr>
         <p:txBody>
-          <a:bodyPr wrap="square" anchor="t">
+          <a:bodyPr wrap="square" lIns="0" rIns="0" tIns="0" bIns="0">
             <a:spAutoFit/>
           </a:bodyPr>
           <a:lstStyle/>
           <a:p>
-            <a:pPr algn="l"/>
+            <a:pPr algn="l">
+              <a:spcBef>
+                <a:spcPts val="0"/>
+              </a:spcBef>
+              <a:spcAft>
+                <a:spcPts val="200"/>
+              </a:spcAft>
+            </a:pPr>
             <a:r>
               <a:rPr sz="1200" b="1">
                 <a:solidFill>
@@ -5997,33 +5773,20 @@
               <a:t>User action</a:t>
             </a:r>
           </a:p>
-        </p:txBody>
-      </p:sp>
-      <p:sp>
-        <p:nvSpPr>
-          <p:cNvPr id="8" name="TextBox 7"/>
-          <p:cNvSpPr txBox="1"/>
-          <p:nvPr/>
-        </p:nvSpPr>
-        <p:spPr>
-          <a:xfrm>
-            <a:off x="749808" y="1353312"/>
-            <a:ext cx="3931920" cy="621792"/>
-          </a:xfrm>
-          <a:prstGeom prst="rect">
-            <a:avLst/>
-          </a:prstGeom>
-          <a:noFill/>
-        </p:spPr>
-        <p:txBody>
-          <a:bodyPr wrap="square" anchor="t">
-            <a:spAutoFit/>
-          </a:bodyPr>
-          <a:lstStyle/>
-          <a:p>
-            <a:pPr algn="l"/>
-            <a:r>
-              <a:rPr sz="1600" b="0">
+          <a:p>
+            <a:pPr algn="l">
+              <a:lnSpc>
+                <a:spcPct val="110000"/>
+              </a:lnSpc>
+              <a:spcBef>
+                <a:spcPts val="0"/>
+              </a:spcBef>
+              <a:spcAft>
+                <a:spcPts val="800"/>
+              </a:spcAft>
+            </a:pPr>
+            <a:r>
+              <a:rPr sz="1300">
                 <a:solidFill>
                   <a:srgbClr val="102A43"/>
                 </a:solidFill>
@@ -6032,31 +5795,15 @@
               <a:t>Open the field-rep login page tied to the active campaign.</a:t>
             </a:r>
           </a:p>
-        </p:txBody>
-      </p:sp>
-      <p:sp>
-        <p:nvSpPr>
-          <p:cNvPr id="9" name="TextBox 8"/>
-          <p:cNvSpPr txBox="1"/>
-          <p:nvPr/>
-        </p:nvSpPr>
-        <p:spPr>
-          <a:xfrm>
-            <a:off x="749808" y="2011680"/>
-            <a:ext cx="4023360" cy="256032"/>
-          </a:xfrm>
-          <a:prstGeom prst="rect">
-            <a:avLst/>
-          </a:prstGeom>
-          <a:noFill/>
-        </p:spPr>
-        <p:txBody>
-          <a:bodyPr wrap="square" anchor="t">
-            <a:spAutoFit/>
-          </a:bodyPr>
-          <a:lstStyle/>
-          <a:p>
-            <a:pPr algn="l"/>
+          <a:p>
+            <a:pPr algn="l">
+              <a:spcBef>
+                <a:spcPts val="0"/>
+              </a:spcBef>
+              <a:spcAft>
+                <a:spcPts val="200"/>
+              </a:spcAft>
+            </a:pPr>
             <a:r>
               <a:rPr sz="1200" b="1">
                 <a:solidFill>
@@ -6067,66 +5814,37 @@
               <a:t>What appears on screen</a:t>
             </a:r>
           </a:p>
-        </p:txBody>
-      </p:sp>
-      <p:sp>
-        <p:nvSpPr>
-          <p:cNvPr id="10" name="TextBox 9"/>
-          <p:cNvSpPr txBox="1"/>
-          <p:nvPr/>
-        </p:nvSpPr>
-        <p:spPr>
-          <a:xfrm>
-            <a:off x="749808" y="2267712"/>
-            <a:ext cx="3931920" cy="713232"/>
-          </a:xfrm>
-          <a:prstGeom prst="rect">
-            <a:avLst/>
-          </a:prstGeom>
-          <a:noFill/>
-        </p:spPr>
-        <p:txBody>
-          <a:bodyPr wrap="square" anchor="t">
-            <a:spAutoFit/>
-          </a:bodyPr>
-          <a:lstStyle/>
-          <a:p>
-            <a:pPr algn="l"/>
-            <a:r>
-              <a:rPr sz="1600" b="0">
+          <a:p>
+            <a:pPr algn="l">
+              <a:lnSpc>
+                <a:spcPct val="110000"/>
+              </a:lnSpc>
+              <a:spcBef>
+                <a:spcPts val="0"/>
+              </a:spcBef>
+              <a:spcAft>
+                <a:spcPts val="800"/>
+              </a:spcAft>
+            </a:pPr>
+            <a:r>
+              <a:rPr sz="1300">
                 <a:solidFill>
                   <a:srgbClr val="102A43"/>
                 </a:solidFill>
                 <a:latin typeface="Aptos"/>
               </a:rPr>
-              <a:t>A focused login form that asks for email and password, preserves campaign context, and includes the same support chatbot used on the other public rep pages.</a:t>
-            </a:r>
-          </a:p>
-        </p:txBody>
-      </p:sp>
-      <p:sp>
-        <p:nvSpPr>
-          <p:cNvPr id="11" name="TextBox 10"/>
-          <p:cNvSpPr txBox="1"/>
-          <p:nvPr/>
-        </p:nvSpPr>
-        <p:spPr>
-          <a:xfrm>
-            <a:off x="749808" y="3063240"/>
-            <a:ext cx="4023360" cy="256032"/>
-          </a:xfrm>
-          <a:prstGeom prst="rect">
-            <a:avLst/>
-          </a:prstGeom>
-          <a:noFill/>
-        </p:spPr>
-        <p:txBody>
-          <a:bodyPr wrap="square" anchor="t">
-            <a:spAutoFit/>
-          </a:bodyPr>
-          <a:lstStyle/>
-          <a:p>
-            <a:pPr algn="l"/>
+              <a:t>A focused login form that asks for email and password, preserves campaign context, and exposes a `Forgot Password?` link below the primary login button.</a:t>
+            </a:r>
+          </a:p>
+          <a:p>
+            <a:pPr algn="l">
+              <a:spcBef>
+                <a:spcPts val="0"/>
+              </a:spcBef>
+              <a:spcAft>
+                <a:spcPts val="200"/>
+              </a:spcAft>
+            </a:pPr>
             <a:r>
               <a:rPr sz="1200" b="1">
                 <a:solidFill>
@@ -6137,33 +5855,20 @@
               <a:t>Why it matters</a:t>
             </a:r>
           </a:p>
-        </p:txBody>
-      </p:sp>
-      <p:sp>
-        <p:nvSpPr>
-          <p:cNvPr id="12" name="TextBox 11"/>
-          <p:cNvSpPr txBox="1"/>
-          <p:nvPr/>
-        </p:nvSpPr>
-        <p:spPr>
-          <a:xfrm>
-            <a:off x="749808" y="3319272"/>
-            <a:ext cx="3931920" cy="640080"/>
-          </a:xfrm>
-          <a:prstGeom prst="rect">
-            <a:avLst/>
-          </a:prstGeom>
-          <a:noFill/>
-        </p:spPr>
-        <p:txBody>
-          <a:bodyPr wrap="square" anchor="t">
-            <a:spAutoFit/>
-          </a:bodyPr>
-          <a:lstStyle/>
-          <a:p>
-            <a:pPr algn="l"/>
-            <a:r>
-              <a:rPr sz="1500" b="0">
+          <a:p>
+            <a:pPr algn="l">
+              <a:lnSpc>
+                <a:spcPct val="110000"/>
+              </a:lnSpc>
+              <a:spcBef>
+                <a:spcPts val="0"/>
+              </a:spcBef>
+              <a:spcAft>
+                <a:spcPts val="800"/>
+              </a:spcAft>
+            </a:pPr>
+            <a:r>
+              <a:rPr sz="1300">
                 <a:solidFill>
                   <a:srgbClr val="102A43"/>
                 </a:solidFill>
@@ -6172,31 +5877,15 @@
               <a:t>This is the most straightforward rep-login method for routine use.</a:t>
             </a:r>
           </a:p>
-        </p:txBody>
-      </p:sp>
-      <p:sp>
-        <p:nvSpPr>
-          <p:cNvPr id="13" name="TextBox 12"/>
-          <p:cNvSpPr txBox="1"/>
-          <p:nvPr/>
-        </p:nvSpPr>
-        <p:spPr>
-          <a:xfrm>
-            <a:off x="749808" y="4069080"/>
-            <a:ext cx="4023360" cy="256032"/>
-          </a:xfrm>
-          <a:prstGeom prst="rect">
-            <a:avLst/>
-          </a:prstGeom>
-          <a:noFill/>
-        </p:spPr>
-        <p:txBody>
-          <a:bodyPr wrap="square" anchor="t">
-            <a:spAutoFit/>
-          </a:bodyPr>
-          <a:lstStyle/>
-          <a:p>
-            <a:pPr algn="l"/>
+          <a:p>
+            <a:pPr algn="l">
+              <a:spcBef>
+                <a:spcPts val="0"/>
+              </a:spcBef>
+              <a:spcAft>
+                <a:spcPts val="200"/>
+              </a:spcAft>
+            </a:pPr>
             <a:r>
               <a:rPr sz="1200" b="1">
                 <a:solidFill>
@@ -6207,33 +5896,20 @@
               <a:t>Expected result</a:t>
             </a:r>
           </a:p>
-        </p:txBody>
-      </p:sp>
-      <p:sp>
-        <p:nvSpPr>
-          <p:cNvPr id="14" name="TextBox 13"/>
-          <p:cNvSpPr txBox="1"/>
-          <p:nvPr/>
-        </p:nvSpPr>
-        <p:spPr>
-          <a:xfrm>
-            <a:off x="749808" y="4325112"/>
-            <a:ext cx="3931920" cy="566928"/>
-          </a:xfrm>
-          <a:prstGeom prst="rect">
-            <a:avLst/>
-          </a:prstGeom>
-          <a:noFill/>
-        </p:spPr>
-        <p:txBody>
-          <a:bodyPr wrap="square" anchor="t">
-            <a:spAutoFit/>
-          </a:bodyPr>
-          <a:lstStyle/>
-          <a:p>
-            <a:pPr algn="l"/>
-            <a:r>
-              <a:rPr sz="1500" b="0">
+          <a:p>
+            <a:pPr algn="l">
+              <a:lnSpc>
+                <a:spcPct val="110000"/>
+              </a:lnSpc>
+              <a:spcBef>
+                <a:spcPts val="0"/>
+              </a:spcBef>
+              <a:spcAft>
+                <a:spcPts val="800"/>
+              </a:spcAft>
+            </a:pPr>
+            <a:r>
+              <a:rPr sz="1300">
                 <a:solidFill>
                   <a:srgbClr val="102A43"/>
                 </a:solidFill>
@@ -6242,31 +5918,15 @@
               <a:t>The rep knows where to enter their standard credentials when the campaign requires the password flow.</a:t>
             </a:r>
           </a:p>
-        </p:txBody>
-      </p:sp>
-      <p:sp>
-        <p:nvSpPr>
-          <p:cNvPr id="15" name="TextBox 14"/>
-          <p:cNvSpPr txBox="1"/>
-          <p:nvPr/>
-        </p:nvSpPr>
-        <p:spPr>
-          <a:xfrm>
-            <a:off x="749808" y="4965192"/>
-            <a:ext cx="4023360" cy="256032"/>
-          </a:xfrm>
-          <a:prstGeom prst="rect">
-            <a:avLst/>
-          </a:prstGeom>
-          <a:noFill/>
-        </p:spPr>
-        <p:txBody>
-          <a:bodyPr wrap="square" anchor="t">
-            <a:spAutoFit/>
-          </a:bodyPr>
-          <a:lstStyle/>
-          <a:p>
-            <a:pPr algn="l"/>
+          <a:p>
+            <a:pPr algn="l">
+              <a:spcBef>
+                <a:spcPts val="0"/>
+              </a:spcBef>
+              <a:spcAft>
+                <a:spcPts val="200"/>
+              </a:spcAft>
+            </a:pPr>
             <a:r>
               <a:rPr sz="1200" b="1">
                 <a:solidFill>
@@ -6277,33 +5937,20 @@
               <a:t>Trainer note</a:t>
             </a:r>
           </a:p>
-        </p:txBody>
-      </p:sp>
-      <p:sp>
-        <p:nvSpPr>
-          <p:cNvPr id="16" name="TextBox 15"/>
-          <p:cNvSpPr txBox="1"/>
-          <p:nvPr/>
-        </p:nvSpPr>
-        <p:spPr>
-          <a:xfrm>
-            <a:off x="749808" y="5212080"/>
-            <a:ext cx="3931920" cy="640080"/>
-          </a:xfrm>
-          <a:prstGeom prst="rect">
-            <a:avLst/>
-          </a:prstGeom>
-          <a:noFill/>
-        </p:spPr>
-        <p:txBody>
-          <a:bodyPr wrap="square" anchor="t">
-            <a:spAutoFit/>
-          </a:bodyPr>
-          <a:lstStyle/>
-          <a:p>
-            <a:pPr algn="l"/>
-            <a:r>
-              <a:rPr sz="1300" b="0">
+          <a:p>
+            <a:pPr algn="l">
+              <a:lnSpc>
+                <a:spcPct val="110000"/>
+              </a:lnSpc>
+              <a:spcBef>
+                <a:spcPts val="0"/>
+              </a:spcBef>
+              <a:spcAft>
+                <a:spcPts val="0"/>
+              </a:spcAft>
+            </a:pPr>
+            <a:r>
+              <a:rPr sz="1200">
                 <a:solidFill>
                   <a:srgbClr val="52667A"/>
                 </a:solidFill>
@@ -6316,7 +5963,7 @@
       </p:sp>
       <p:sp>
         <p:nvSpPr>
-          <p:cNvPr id="17" name="Rounded Rectangle 16"/>
+          <p:cNvPr id="8" name="Rounded Rectangle 7"/>
           <p:cNvSpPr/>
           <p:nvPr/>
         </p:nvSpPr>
@@ -6361,7 +6008,7 @@
       </p:sp>
       <p:sp>
         <p:nvSpPr>
-          <p:cNvPr id="18" name="TextBox 17"/>
+          <p:cNvPr id="9" name="TextBox 8"/>
           <p:cNvSpPr txBox="1"/>
           <p:nvPr/>
         </p:nvSpPr>
@@ -6396,7 +6043,7 @@
       </p:sp>
       <p:pic>
         <p:nvPicPr>
-          <p:cNvPr id="19" name="Picture 18" descr="fieldrep-login.png"/>
+          <p:cNvPr id="10" name="Picture 9" descr="fieldrep-login.png"/>
           <p:cNvPicPr>
             <a:picLocks noChangeAspect="1"/>
           </p:cNvPicPr>
@@ -6420,7 +6067,7 @@
       </p:pic>
       <p:sp>
         <p:nvSpPr>
-          <p:cNvPr id="20" name="TextBox 19"/>
+          <p:cNvPr id="11" name="TextBox 10"/>
           <p:cNvSpPr txBox="1"/>
           <p:nvPr/>
         </p:nvSpPr>
@@ -6455,7 +6102,7 @@
       </p:sp>
       <p:sp>
         <p:nvSpPr>
-          <p:cNvPr id="21" name="TextBox 20"/>
+          <p:cNvPr id="12" name="TextBox 11"/>
           <p:cNvSpPr txBox="1"/>
           <p:nvPr/>
         </p:nvSpPr>
@@ -6634,7 +6281,7 @@
                 </a:solidFill>
                 <a:latin typeface="Aptos"/>
               </a:rPr>
-              <a:t>Step 4: Use the active Gmail/manual or SSO login path</a:t>
+              <a:t>Step 4: Recover access with the security-question flow when needed</a:t>
             </a:r>
           </a:p>
         </p:txBody>
@@ -6728,7 +6375,7 @@
         <p:spPr>
           <a:xfrm>
             <a:off x="749808" y="1097280"/>
-            <a:ext cx="4023360" cy="256032"/>
+            <a:ext cx="3931920" cy="4754880"/>
           </a:xfrm>
           <a:prstGeom prst="rect">
             <a:avLst/>
@@ -6736,12 +6383,19 @@
           <a:noFill/>
         </p:spPr>
         <p:txBody>
-          <a:bodyPr wrap="square" anchor="t">
+          <a:bodyPr wrap="square" lIns="0" rIns="0" tIns="0" bIns="0">
             <a:spAutoFit/>
           </a:bodyPr>
           <a:lstStyle/>
           <a:p>
-            <a:pPr algn="l"/>
+            <a:pPr algn="l">
+              <a:spcBef>
+                <a:spcPts val="0"/>
+              </a:spcBef>
+              <a:spcAft>
+                <a:spcPts val="200"/>
+              </a:spcAft>
+            </a:pPr>
             <a:r>
               <a:rPr sz="1200" b="1">
                 <a:solidFill>
@@ -6752,66 +6406,37 @@
               <a:t>User action</a:t>
             </a:r>
           </a:p>
-        </p:txBody>
-      </p:sp>
-      <p:sp>
-        <p:nvSpPr>
-          <p:cNvPr id="8" name="TextBox 7"/>
-          <p:cNvSpPr txBox="1"/>
-          <p:nvPr/>
-        </p:nvSpPr>
-        <p:spPr>
-          <a:xfrm>
-            <a:off x="749808" y="1353312"/>
-            <a:ext cx="3931920" cy="621792"/>
-          </a:xfrm>
-          <a:prstGeom prst="rect">
-            <a:avLst/>
-          </a:prstGeom>
-          <a:noFill/>
-        </p:spPr>
-        <p:txBody>
-          <a:bodyPr wrap="square" anchor="t">
-            <a:spAutoFit/>
-          </a:bodyPr>
-          <a:lstStyle/>
-          <a:p>
-            <a:pPr algn="l"/>
-            <a:r>
-              <a:rPr sz="1600" b="0">
+          <a:p>
+            <a:pPr algn="l">
+              <a:lnSpc>
+                <a:spcPct val="110000"/>
+              </a:lnSpc>
+              <a:spcBef>
+                <a:spcPts val="0"/>
+              </a:spcBef>
+              <a:spcAft>
+                <a:spcPts val="800"/>
+              </a:spcAft>
+            </a:pPr>
+            <a:r>
+              <a:rPr sz="1200">
                 <a:solidFill>
                   <a:srgbClr val="102A43"/>
                 </a:solidFill>
                 <a:latin typeface="Aptos"/>
               </a:rPr>
-              <a:t>Open the Gmail login route and either enter the Brand Specific Field ID plus Email ID manually or arrive through a signed SSO link that provides those values automatically.</a:t>
-            </a:r>
-          </a:p>
-        </p:txBody>
-      </p:sp>
-      <p:sp>
-        <p:nvSpPr>
-          <p:cNvPr id="9" name="TextBox 8"/>
-          <p:cNvSpPr txBox="1"/>
-          <p:nvPr/>
-        </p:nvSpPr>
-        <p:spPr>
-          <a:xfrm>
-            <a:off x="749808" y="2011680"/>
-            <a:ext cx="4023360" cy="256032"/>
-          </a:xfrm>
-          <a:prstGeom prst="rect">
-            <a:avLst/>
-          </a:prstGeom>
-          <a:noFill/>
-        </p:spPr>
-        <p:txBody>
-          <a:bodyPr wrap="square" anchor="t">
-            <a:spAutoFit/>
-          </a:bodyPr>
-          <a:lstStyle/>
-          <a:p>
-            <a:pPr algn="l"/>
+              <a:t>Use the `Forgot Password?` link, enter the rep email, answer the configured security question, and continue to the reset-password page.</a:t>
+            </a:r>
+          </a:p>
+          <a:p>
+            <a:pPr algn="l">
+              <a:spcBef>
+                <a:spcPts val="0"/>
+              </a:spcBef>
+              <a:spcAft>
+                <a:spcPts val="200"/>
+              </a:spcAft>
+            </a:pPr>
             <a:r>
               <a:rPr sz="1200" b="1">
                 <a:solidFill>
@@ -6822,66 +6447,37 @@
               <a:t>What appears on screen</a:t>
             </a:r>
           </a:p>
-        </p:txBody>
-      </p:sp>
-      <p:sp>
-        <p:nvSpPr>
-          <p:cNvPr id="10" name="TextBox 9"/>
-          <p:cNvSpPr txBox="1"/>
-          <p:nvPr/>
-        </p:nvSpPr>
-        <p:spPr>
-          <a:xfrm>
-            <a:off x="749808" y="2267712"/>
-            <a:ext cx="3931920" cy="713232"/>
-          </a:xfrm>
-          <a:prstGeom prst="rect">
-            <a:avLst/>
-          </a:prstGeom>
-          <a:noFill/>
-        </p:spPr>
-        <p:txBody>
-          <a:bodyPr wrap="square" anchor="t">
-            <a:spAutoFit/>
-          </a:bodyPr>
-          <a:lstStyle/>
-          <a:p>
-            <a:pPr algn="l"/>
-            <a:r>
-              <a:rPr sz="1600" b="0">
+          <a:p>
+            <a:pPr algn="l">
+              <a:lnSpc>
+                <a:spcPct val="110000"/>
+              </a:lnSpc>
+              <a:spcBef>
+                <a:spcPts val="0"/>
+              </a:spcBef>
+              <a:spcAft>
+                <a:spcPts val="800"/>
+              </a:spcAft>
+            </a:pPr>
+            <a:r>
+              <a:rPr sz="1200">
                 <a:solidFill>
                   <a:srgbClr val="102A43"/>
                 </a:solidFill>
                 <a:latin typeface="Aptos"/>
               </a:rPr>
-              <a:t>A campaign-scoped login form labeled Brand Specific Field ID and Email ID, along with the campaign context and the floating support chatbot.</a:t>
-            </a:r>
-          </a:p>
-        </p:txBody>
-      </p:sp>
-      <p:sp>
-        <p:nvSpPr>
-          <p:cNvPr id="11" name="TextBox 10"/>
-          <p:cNvSpPr txBox="1"/>
-          <p:nvPr/>
-        </p:nvSpPr>
-        <p:spPr>
-          <a:xfrm>
-            <a:off x="749808" y="3063240"/>
-            <a:ext cx="4023360" cy="256032"/>
-          </a:xfrm>
-          <a:prstGeom prst="rect">
-            <a:avLst/>
-          </a:prstGeom>
-          <a:noFill/>
-        </p:spPr>
-        <p:txBody>
-          <a:bodyPr wrap="square" anchor="t">
-            <a:spAutoFit/>
-          </a:bodyPr>
-          <a:lstStyle/>
-          <a:p>
-            <a:pPr algn="l"/>
+              <a:t>A two-stage recovery screen that first asks for the email address, then shows the rep's saved security question and answer field before allowing a reset.</a:t>
+            </a:r>
+          </a:p>
+          <a:p>
+            <a:pPr algn="l">
+              <a:spcBef>
+                <a:spcPts val="0"/>
+              </a:spcBef>
+              <a:spcAft>
+                <a:spcPts val="200"/>
+              </a:spcAft>
+            </a:pPr>
             <a:r>
               <a:rPr sz="1200" b="1">
                 <a:solidFill>
@@ -6892,66 +6488,37 @@
               <a:t>Why it matters</a:t>
             </a:r>
           </a:p>
-        </p:txBody>
-      </p:sp>
-      <p:sp>
-        <p:nvSpPr>
-          <p:cNvPr id="12" name="TextBox 11"/>
-          <p:cNvSpPr txBox="1"/>
-          <p:nvPr/>
-        </p:nvSpPr>
-        <p:spPr>
-          <a:xfrm>
-            <a:off x="749808" y="3319272"/>
-            <a:ext cx="3931920" cy="640080"/>
-          </a:xfrm>
-          <a:prstGeom prst="rect">
-            <a:avLst/>
-          </a:prstGeom>
-          <a:noFill/>
-        </p:spPr>
-        <p:txBody>
-          <a:bodyPr wrap="square" anchor="t">
-            <a:spAutoFit/>
-          </a:bodyPr>
-          <a:lstStyle/>
-          <a:p>
-            <a:pPr algn="l"/>
-            <a:r>
-              <a:rPr sz="1500" b="0">
+          <a:p>
+            <a:pPr algn="l">
+              <a:lnSpc>
+                <a:spcPct val="110000"/>
+              </a:lnSpc>
+              <a:spcBef>
+                <a:spcPts val="0"/>
+              </a:spcBef>
+              <a:spcAft>
+                <a:spcPts val="800"/>
+              </a:spcAft>
+            </a:pPr>
+            <a:r>
+              <a:rPr sz="1200">
                 <a:solidFill>
                   <a:srgbClr val="102A43"/>
                 </a:solidFill>
                 <a:latin typeface="Aptos"/>
               </a:rPr>
-              <a:t>This is the primary live access route into the share experience and the path used by the seeded demo.</a:t>
-            </a:r>
-          </a:p>
-        </p:txBody>
-      </p:sp>
-      <p:sp>
-        <p:nvSpPr>
-          <p:cNvPr id="13" name="TextBox 12"/>
-          <p:cNvSpPr txBox="1"/>
-          <p:nvPr/>
-        </p:nvSpPr>
-        <p:spPr>
-          <a:xfrm>
-            <a:off x="749808" y="4069080"/>
-            <a:ext cx="4023360" cy="256032"/>
-          </a:xfrm>
-          <a:prstGeom prst="rect">
-            <a:avLst/>
-          </a:prstGeom>
-          <a:noFill/>
-        </p:spPr>
-        <p:txBody>
-          <a:bodyPr wrap="square" anchor="t">
-            <a:spAutoFit/>
-          </a:bodyPr>
-          <a:lstStyle/>
-          <a:p>
-            <a:pPr algn="l"/>
+              <a:t>This is the live fallback when a rep remembers their email but not their current password.</a:t>
+            </a:r>
+          </a:p>
+          <a:p>
+            <a:pPr algn="l">
+              <a:spcBef>
+                <a:spcPts val="0"/>
+              </a:spcBef>
+              <a:spcAft>
+                <a:spcPts val="200"/>
+              </a:spcAft>
+            </a:pPr>
             <a:r>
               <a:rPr sz="1200" b="1">
                 <a:solidFill>
@@ -6962,66 +6529,37 @@
               <a:t>Expected result</a:t>
             </a:r>
           </a:p>
-        </p:txBody>
-      </p:sp>
-      <p:sp>
-        <p:nvSpPr>
-          <p:cNvPr id="14" name="TextBox 13"/>
-          <p:cNvSpPr txBox="1"/>
-          <p:nvPr/>
-        </p:nvSpPr>
-        <p:spPr>
-          <a:xfrm>
-            <a:off x="749808" y="4325112"/>
-            <a:ext cx="3931920" cy="566928"/>
-          </a:xfrm>
-          <a:prstGeom prst="rect">
-            <a:avLst/>
-          </a:prstGeom>
-          <a:noFill/>
-        </p:spPr>
-        <p:txBody>
-          <a:bodyPr wrap="square" anchor="t">
-            <a:spAutoFit/>
-          </a:bodyPr>
-          <a:lstStyle/>
-          <a:p>
-            <a:pPr algn="l"/>
-            <a:r>
-              <a:rPr sz="1500" b="0">
+          <a:p>
+            <a:pPr algn="l">
+              <a:lnSpc>
+                <a:spcPct val="110000"/>
+              </a:lnSpc>
+              <a:spcBef>
+                <a:spcPts val="0"/>
+              </a:spcBef>
+              <a:spcAft>
+                <a:spcPts val="800"/>
+              </a:spcAft>
+            </a:pPr>
+            <a:r>
+              <a:rPr sz="1200">
                 <a:solidFill>
                   <a:srgbClr val="102A43"/>
                 </a:solidFill>
                 <a:latin typeface="Aptos"/>
               </a:rPr>
-              <a:t>The rep reaches the campaign share page with the correct assignment and session context.</a:t>
-            </a:r>
-          </a:p>
-        </p:txBody>
-      </p:sp>
-      <p:sp>
-        <p:nvSpPr>
-          <p:cNvPr id="15" name="TextBox 14"/>
-          <p:cNvSpPr txBox="1"/>
-          <p:nvPr/>
-        </p:nvSpPr>
-        <p:spPr>
-          <a:xfrm>
-            <a:off x="749808" y="4965192"/>
-            <a:ext cx="4023360" cy="256032"/>
-          </a:xfrm>
-          <a:prstGeom prst="rect">
-            <a:avLst/>
-          </a:prstGeom>
-          <a:noFill/>
-        </p:spPr>
-        <p:txBody>
-          <a:bodyPr wrap="square" anchor="t">
-            <a:spAutoFit/>
-          </a:bodyPr>
-          <a:lstStyle/>
-          <a:p>
-            <a:pPr algn="l"/>
+              <a:t>The rep can reach the reset-password step without staff manually changing credentials.</a:t>
+            </a:r>
+          </a:p>
+          <a:p>
+            <a:pPr algn="l">
+              <a:spcBef>
+                <a:spcPts val="0"/>
+              </a:spcBef>
+              <a:spcAft>
+                <a:spcPts val="200"/>
+              </a:spcAft>
+            </a:pPr>
             <a:r>
               <a:rPr sz="1200" b="1">
                 <a:solidFill>
@@ -7032,46 +6570,33 @@
               <a:t>Trainer note</a:t>
             </a:r>
           </a:p>
-        </p:txBody>
-      </p:sp>
-      <p:sp>
-        <p:nvSpPr>
-          <p:cNvPr id="16" name="TextBox 15"/>
-          <p:cNvSpPr txBox="1"/>
-          <p:nvPr/>
-        </p:nvSpPr>
-        <p:spPr>
-          <a:xfrm>
-            <a:off x="749808" y="5212080"/>
-            <a:ext cx="3931920" cy="640080"/>
-          </a:xfrm>
-          <a:prstGeom prst="rect">
-            <a:avLst/>
-          </a:prstGeom>
-          <a:noFill/>
-        </p:spPr>
-        <p:txBody>
-          <a:bodyPr wrap="square" anchor="t">
-            <a:spAutoFit/>
-          </a:bodyPr>
-          <a:lstStyle/>
-          <a:p>
-            <a:pPr algn="l"/>
-            <a:r>
-              <a:rPr sz="1300" b="0">
+          <a:p>
+            <a:pPr algn="l">
+              <a:lnSpc>
+                <a:spcPct val="110000"/>
+              </a:lnSpc>
+              <a:spcBef>
+                <a:spcPts val="0"/>
+              </a:spcBef>
+              <a:spcAft>
+                <a:spcPts val="0"/>
+              </a:spcAft>
+            </a:pPr>
+            <a:r>
+              <a:rPr sz="1100">
                 <a:solidFill>
                   <a:srgbClr val="52667A"/>
                 </a:solidFill>
                 <a:latin typeface="Aptos"/>
               </a:rPr>
-              <a:t>Manual login uses the brand-specific Field ID. Automatic SSO trusts the master Field Rep ID from the URL or JWT claims, then completes the same login path.</a:t>
-            </a:r>
-          </a:p>
-        </p:txBody>
-      </p:sp>
-      <p:sp>
-        <p:nvSpPr>
-          <p:cNvPr id="17" name="Rounded Rectangle 16"/>
+              <a:t>Recovery only works if the rep has a security profile and answer configured. If not, the current product tells the user to contact admin.</a:t>
+            </a:r>
+          </a:p>
+        </p:txBody>
+      </p:sp>
+      <p:sp>
+        <p:nvSpPr>
+          <p:cNvPr id="8" name="Rounded Rectangle 7"/>
           <p:cNvSpPr/>
           <p:nvPr/>
         </p:nvSpPr>
@@ -7116,7 +6641,7 @@
       </p:sp>
       <p:sp>
         <p:nvSpPr>
-          <p:cNvPr id="18" name="TextBox 17"/>
+          <p:cNvPr id="9" name="TextBox 8"/>
           <p:cNvSpPr txBox="1"/>
           <p:nvPr/>
         </p:nvSpPr>
@@ -7144,14 +6669,14 @@
                 </a:solidFill>
                 <a:latin typeface="Aptos"/>
               </a:rPr>
-              <a:t>Current Gmail/manual login page used for campaign-scoped rep access.</a:t>
+              <a:t>Field-rep recovery screen showing the security-question challenge before password reset.</a:t>
             </a:r>
           </a:p>
         </p:txBody>
       </p:sp>
       <p:pic>
         <p:nvPicPr>
-          <p:cNvPr id="19" name="Picture 18" descr="fieldrep-gmail-login.png"/>
+          <p:cNvPr id="10" name="Picture 9" descr="fieldrep-forgot-password.png"/>
           <p:cNvPicPr>
             <a:picLocks noChangeAspect="1"/>
           </p:cNvPicPr>
@@ -7175,7 +6700,7 @@
       </p:pic>
       <p:sp>
         <p:nvSpPr>
-          <p:cNvPr id="20" name="TextBox 19"/>
+          <p:cNvPr id="11" name="TextBox 10"/>
           <p:cNvSpPr txBox="1"/>
           <p:nvPr/>
         </p:nvSpPr>
@@ -7203,14 +6728,14 @@
                 </a:solidFill>
                 <a:latin typeface="Aptos"/>
               </a:rPr>
-              <a:t>The Brand Specific Field ID and Email ID fields that lead directly into the share experience.</a:t>
-            </a:r>
-          </a:p>
-        </p:txBody>
-      </p:sp>
-      <p:sp>
-        <p:nvSpPr>
-          <p:cNvPr id="21" name="TextBox 20"/>
+              <a:t>The recovery path that bridges from forgotten password into reset-password.</a:t>
+            </a:r>
+          </a:p>
+        </p:txBody>
+      </p:sp>
+      <p:sp>
+        <p:nvSpPr>
+          <p:cNvPr id="12" name="TextBox 11"/>
           <p:cNvSpPr txBox="1"/>
           <p:nvPr/>
         </p:nvSpPr>
@@ -7238,7 +6763,7 @@
                 </a:solidFill>
                 <a:latin typeface="Aptos"/>
               </a:rPr>
-              <a:t>Screenshot asset: docs/product-user-flows/assets/field-rep-registration-and-login/fieldrep-gmail-login.png</a:t>
+              <a:t>Screenshot asset: docs/product-user-flows/assets/field-rep-registration-and-login/fieldrep-forgot-password.png</a:t>
             </a:r>
           </a:p>
         </p:txBody>
@@ -7383,13 +6908,13 @@
           <a:p>
             <a:pPr algn="l"/>
             <a:r>
-              <a:rPr sz="2600" b="1">
+              <a:rPr sz="1800" b="1">
                 <a:solidFill>
                   <a:srgbClr val="FFFFFF"/>
                 </a:solidFill>
                 <a:latin typeface="Aptos"/>
               </a:rPr>
-              <a:t>Trainer Tips</a:t>
+              <a:t>Step 5: Use the active Gmail/manual or SSO login path</a:t>
             </a:r>
           </a:p>
         </p:txBody>
@@ -7437,8 +6962,8 @@
         </p:nvSpPr>
         <p:spPr>
           <a:xfrm>
-            <a:off x="640080" y="1188720"/>
-            <a:ext cx="10972800" cy="4389120"/>
+            <a:off x="502920" y="914400"/>
+            <a:ext cx="4572000" cy="5212080"/>
           </a:xfrm>
           <a:prstGeom prst="roundRect">
             <a:avLst/>
@@ -7482,8 +7007,281 @@
         </p:nvSpPr>
         <p:spPr>
           <a:xfrm>
-            <a:off x="914400" y="1463040"/>
-            <a:ext cx="2286000" cy="274320"/>
+            <a:off x="749808" y="1097280"/>
+            <a:ext cx="3931920" cy="4754880"/>
+          </a:xfrm>
+          <a:prstGeom prst="rect">
+            <a:avLst/>
+          </a:prstGeom>
+          <a:noFill/>
+        </p:spPr>
+        <p:txBody>
+          <a:bodyPr wrap="square" lIns="0" rIns="0" tIns="0" bIns="0">
+            <a:spAutoFit/>
+          </a:bodyPr>
+          <a:lstStyle/>
+          <a:p>
+            <a:pPr algn="l">
+              <a:spcBef>
+                <a:spcPts val="0"/>
+              </a:spcBef>
+              <a:spcAft>
+                <a:spcPts val="200"/>
+              </a:spcAft>
+            </a:pPr>
+            <a:r>
+              <a:rPr sz="1200" b="1">
+                <a:solidFill>
+                  <a:srgbClr val="14B8A6"/>
+                </a:solidFill>
+                <a:latin typeface="Aptos"/>
+              </a:rPr>
+              <a:t>User action</a:t>
+            </a:r>
+          </a:p>
+          <a:p>
+            <a:pPr algn="l">
+              <a:lnSpc>
+                <a:spcPct val="110000"/>
+              </a:lnSpc>
+              <a:spcBef>
+                <a:spcPts val="0"/>
+              </a:spcBef>
+              <a:spcAft>
+                <a:spcPts val="800"/>
+              </a:spcAft>
+            </a:pPr>
+            <a:r>
+              <a:rPr sz="1100">
+                <a:solidFill>
+                  <a:srgbClr val="102A43"/>
+                </a:solidFill>
+                <a:latin typeface="Aptos"/>
+              </a:rPr>
+              <a:t>Open the Gmail login route and either enter the Brand Specific Field ID plus Email ID manually or arrive through a signed SSO link that provides those values automatically.</a:t>
+            </a:r>
+          </a:p>
+          <a:p>
+            <a:pPr algn="l">
+              <a:spcBef>
+                <a:spcPts val="0"/>
+              </a:spcBef>
+              <a:spcAft>
+                <a:spcPts val="200"/>
+              </a:spcAft>
+            </a:pPr>
+            <a:r>
+              <a:rPr sz="1200" b="1">
+                <a:solidFill>
+                  <a:srgbClr val="14B8A6"/>
+                </a:solidFill>
+                <a:latin typeface="Aptos"/>
+              </a:rPr>
+              <a:t>What appears on screen</a:t>
+            </a:r>
+          </a:p>
+          <a:p>
+            <a:pPr algn="l">
+              <a:lnSpc>
+                <a:spcPct val="110000"/>
+              </a:lnSpc>
+              <a:spcBef>
+                <a:spcPts val="0"/>
+              </a:spcBef>
+              <a:spcAft>
+                <a:spcPts val="800"/>
+              </a:spcAft>
+            </a:pPr>
+            <a:r>
+              <a:rPr sz="1100">
+                <a:solidFill>
+                  <a:srgbClr val="102A43"/>
+                </a:solidFill>
+                <a:latin typeface="Aptos"/>
+              </a:rPr>
+              <a:t>A campaign-scoped login form labeled Brand Specific Field ID and Email ID, along with the campaign context and the floating support chatbot.</a:t>
+            </a:r>
+          </a:p>
+          <a:p>
+            <a:pPr algn="l">
+              <a:spcBef>
+                <a:spcPts val="0"/>
+              </a:spcBef>
+              <a:spcAft>
+                <a:spcPts val="200"/>
+              </a:spcAft>
+            </a:pPr>
+            <a:r>
+              <a:rPr sz="1200" b="1">
+                <a:solidFill>
+                  <a:srgbClr val="14B8A6"/>
+                </a:solidFill>
+                <a:latin typeface="Aptos"/>
+              </a:rPr>
+              <a:t>Why it matters</a:t>
+            </a:r>
+          </a:p>
+          <a:p>
+            <a:pPr algn="l">
+              <a:lnSpc>
+                <a:spcPct val="110000"/>
+              </a:lnSpc>
+              <a:spcBef>
+                <a:spcPts val="0"/>
+              </a:spcBef>
+              <a:spcAft>
+                <a:spcPts val="800"/>
+              </a:spcAft>
+            </a:pPr>
+            <a:r>
+              <a:rPr sz="1100">
+                <a:solidFill>
+                  <a:srgbClr val="102A43"/>
+                </a:solidFill>
+                <a:latin typeface="Aptos"/>
+              </a:rPr>
+              <a:t>This is the primary live access route into the share experience and the path used by the seeded demo.</a:t>
+            </a:r>
+          </a:p>
+          <a:p>
+            <a:pPr algn="l">
+              <a:spcBef>
+                <a:spcPts val="0"/>
+              </a:spcBef>
+              <a:spcAft>
+                <a:spcPts val="200"/>
+              </a:spcAft>
+            </a:pPr>
+            <a:r>
+              <a:rPr sz="1200" b="1">
+                <a:solidFill>
+                  <a:srgbClr val="14B8A6"/>
+                </a:solidFill>
+                <a:latin typeface="Aptos"/>
+              </a:rPr>
+              <a:t>Expected result</a:t>
+            </a:r>
+          </a:p>
+          <a:p>
+            <a:pPr algn="l">
+              <a:lnSpc>
+                <a:spcPct val="110000"/>
+              </a:lnSpc>
+              <a:spcBef>
+                <a:spcPts val="0"/>
+              </a:spcBef>
+              <a:spcAft>
+                <a:spcPts val="800"/>
+              </a:spcAft>
+            </a:pPr>
+            <a:r>
+              <a:rPr sz="1100">
+                <a:solidFill>
+                  <a:srgbClr val="102A43"/>
+                </a:solidFill>
+                <a:latin typeface="Aptos"/>
+              </a:rPr>
+              <a:t>The rep reaches the campaign share page with the correct assignment and session context.</a:t>
+            </a:r>
+          </a:p>
+          <a:p>
+            <a:pPr algn="l">
+              <a:spcBef>
+                <a:spcPts val="0"/>
+              </a:spcBef>
+              <a:spcAft>
+                <a:spcPts val="200"/>
+              </a:spcAft>
+            </a:pPr>
+            <a:r>
+              <a:rPr sz="1200" b="1">
+                <a:solidFill>
+                  <a:srgbClr val="F97316"/>
+                </a:solidFill>
+                <a:latin typeface="Aptos"/>
+              </a:rPr>
+              <a:t>Trainer note</a:t>
+            </a:r>
+          </a:p>
+          <a:p>
+            <a:pPr algn="l">
+              <a:lnSpc>
+                <a:spcPct val="110000"/>
+              </a:lnSpc>
+              <a:spcBef>
+                <a:spcPts val="0"/>
+              </a:spcBef>
+              <a:spcAft>
+                <a:spcPts val="0"/>
+              </a:spcAft>
+            </a:pPr>
+            <a:r>
+              <a:rPr sz="1100">
+                <a:solidFill>
+                  <a:srgbClr val="52667A"/>
+                </a:solidFill>
+                <a:latin typeface="Aptos"/>
+              </a:rPr>
+              <a:t>Manual login uses the brand-specific Field ID. Automatic SSO trusts the master Field Rep ID from the URL or JWT claims, then completes the same login path only if the claim set matches the campaign and rep identifiers in the request.</a:t>
+            </a:r>
+          </a:p>
+        </p:txBody>
+      </p:sp>
+      <p:sp>
+        <p:nvSpPr>
+          <p:cNvPr id="8" name="Rounded Rectangle 7"/>
+          <p:cNvSpPr/>
+          <p:nvPr/>
+        </p:nvSpPr>
+        <p:spPr>
+          <a:xfrm>
+            <a:off x="5303520" y="914400"/>
+            <a:ext cx="6355080" cy="5212080"/>
+          </a:xfrm>
+          <a:prstGeom prst="roundRect">
+            <a:avLst/>
+          </a:prstGeom>
+          <a:solidFill>
+            <a:srgbClr val="FFFFFF"/>
+          </a:solidFill>
+          <a:ln>
+            <a:solidFill>
+              <a:srgbClr val="E2E8F0"/>
+            </a:solidFill>
+          </a:ln>
+        </p:spPr>
+        <p:style>
+          <a:lnRef idx="1">
+            <a:schemeClr val="accent1"/>
+          </a:lnRef>
+          <a:fillRef idx="3">
+            <a:schemeClr val="accent1"/>
+          </a:fillRef>
+          <a:effectRef idx="2">
+            <a:schemeClr val="accent1"/>
+          </a:effectRef>
+          <a:fontRef idx="minor">
+            <a:schemeClr val="lt1"/>
+          </a:fontRef>
+        </p:style>
+        <p:txBody>
+          <a:bodyPr rtlCol="0" anchor="ctr"/>
+          <a:lstStyle/>
+          <a:p>
+            <a:pPr algn="ctr"/>
+          </a:p>
+        </p:txBody>
+      </p:sp>
+      <p:sp>
+        <p:nvSpPr>
+          <p:cNvPr id="9" name="TextBox 8"/>
+          <p:cNvSpPr txBox="1"/>
+          <p:nvPr/>
+        </p:nvSpPr>
+        <p:spPr>
+          <a:xfrm>
+            <a:off x="5577840" y="1097280"/>
+            <a:ext cx="5669280" cy="228600"/>
           </a:xfrm>
           <a:prstGeom prst="rect">
             <a:avLst/>
@@ -7498,74 +7296,51 @@
           <a:p>
             <a:pPr algn="l"/>
             <a:r>
-              <a:rPr sz="1400" b="1">
+              <a:rPr sz="1300" b="1">
                 <a:solidFill>
                   <a:srgbClr val="14B8A6"/>
                 </a:solidFill>
                 <a:latin typeface="Aptos"/>
               </a:rPr>
-              <a:t>Facilitation notes</a:t>
-            </a:r>
-          </a:p>
-        </p:txBody>
-      </p:sp>
-      <p:sp>
-        <p:nvSpPr>
-          <p:cNvPr id="8" name="TextBox 7"/>
+              <a:t>Current Gmail/manual login page used for campaign-scoped rep access.</a:t>
+            </a:r>
+          </a:p>
+        </p:txBody>
+      </p:sp>
+      <p:pic>
+        <p:nvPicPr>
+          <p:cNvPr id="10" name="Picture 9" descr="fieldrep-gmail-login.png"/>
+          <p:cNvPicPr>
+            <a:picLocks noChangeAspect="1"/>
+          </p:cNvPicPr>
+          <p:nvPr/>
+        </p:nvPicPr>
+        <p:blipFill>
+          <a:blip r:embed="rId2"/>
+          <a:stretch>
+            <a:fillRect/>
+          </a:stretch>
+        </p:blipFill>
+        <p:spPr>
+          <a:xfrm>
+            <a:off x="5559552" y="1417320"/>
+            <a:ext cx="5806440" cy="4160520"/>
+          </a:xfrm>
+          <a:prstGeom prst="rect">
+            <a:avLst/>
+          </a:prstGeom>
+        </p:spPr>
+      </p:pic>
+      <p:sp>
+        <p:nvSpPr>
+          <p:cNvPr id="11" name="TextBox 10"/>
           <p:cNvSpPr txBox="1"/>
           <p:nvPr/>
         </p:nvSpPr>
         <p:spPr>
           <a:xfrm>
-            <a:off x="914400" y="1828800"/>
-            <a:ext cx="10241280" cy="3017520"/>
-          </a:xfrm>
-          <a:prstGeom prst="rect">
-            <a:avLst/>
-          </a:prstGeom>
-          <a:noFill/>
-        </p:spPr>
-        <p:txBody>
-          <a:bodyPr wrap="square">
-            <a:spAutoFit/>
-          </a:bodyPr>
-          <a:lstStyle/>
-          <a:p>
-            <a:pPr algn="l"/>
-            <a:r>
-              <a:rPr sz="2200">
-                <a:solidFill>
-                  <a:srgbClr val="102A43"/>
-                </a:solidFill>
-                <a:latin typeface="Aptos"/>
-              </a:rPr>
-              <a:t>Lead with the Gmail/manual screen because it reflects the current launch path most accurately.</a:t>
-            </a:r>
-          </a:p>
-          <a:p>
-            <a:pPr algn="l"/>
-            <a:r>
-              <a:rPr sz="2200">
-                <a:solidFill>
-                  <a:srgbClr val="102A43"/>
-                </a:solidFill>
-                <a:latin typeface="Aptos"/>
-              </a:rPr>
-              <a:t>Keep the rep deck practical: explain the legacy redirects once, then spend the rest of the time on the live login and share flow.</a:t>
-            </a:r>
-          </a:p>
-        </p:txBody>
-      </p:sp>
-      <p:sp>
-        <p:nvSpPr>
-          <p:cNvPr id="9" name="TextBox 8"/>
-          <p:cNvSpPr txBox="1"/>
-          <p:nvPr/>
-        </p:nvSpPr>
-        <p:spPr>
-          <a:xfrm>
-            <a:off x="914400" y="5257800"/>
-            <a:ext cx="10058400" cy="365760"/>
+            <a:off x="5577840" y="5669280"/>
+            <a:ext cx="5623560" cy="320040"/>
           </a:xfrm>
           <a:prstGeom prst="rect">
             <a:avLst/>
@@ -7586,14 +7361,14 @@
                 </a:solidFill>
                 <a:latin typeface="Aptos"/>
               </a:rPr>
-              <a:t>Related documents: docs/product-user-flows/07-field-rep-sharing-and-doctor-bulk-upload.md, backend/sharing_management/views.py, backend/sharing_management/templates/sharing_management/fieldrep_gmail_login.html</a:t>
-            </a:r>
-          </a:p>
-        </p:txBody>
-      </p:sp>
-      <p:sp>
-        <p:nvSpPr>
-          <p:cNvPr id="10" name="TextBox 9"/>
+              <a:t>The Brand Specific Field ID and Email ID fields that lead directly into the share experience.</a:t>
+            </a:r>
+          </a:p>
+        </p:txBody>
+      </p:sp>
+      <p:sp>
+        <p:nvSpPr>
+          <p:cNvPr id="12" name="TextBox 11"/>
           <p:cNvSpPr txBox="1"/>
           <p:nvPr/>
         </p:nvSpPr>
@@ -7621,7 +7396,7 @@
                 </a:solidFill>
                 <a:latin typeface="Aptos"/>
               </a:rPr>
-              <a:t>Validated against the current public rep-access screens on 2026-04-23; legacy registration routes now documented as redirects into Gmail/manual login.</a:t>
+              <a:t>Screenshot asset: docs/product-user-flows/assets/field-rep-registration-and-login/fieldrep-gmail-login.png</a:t>
             </a:r>
           </a:p>
         </p:txBody>
@@ -7635,6 +7410,401 @@
 </file>
 
 <file path=ppt/slides/slide8.xml><?xml version="1.0" encoding="utf-8"?>
+<p:sld xmlns:a="http://schemas.openxmlformats.org/drawingml/2006/main" xmlns:p="http://schemas.openxmlformats.org/presentationml/2006/main" xmlns:r="http://schemas.openxmlformats.org/officeDocument/2006/relationships">
+  <p:cSld>
+    <p:bg>
+      <p:bgPr>
+        <a:solidFill>
+          <a:srgbClr val="F7F8FA"/>
+        </a:solidFill>
+        <a:effectLst/>
+      </p:bgPr>
+    </p:bg>
+    <p:spTree>
+      <p:nvGrpSpPr>
+        <p:cNvPr id="1" name=""/>
+        <p:cNvGrpSpPr/>
+        <p:nvPr/>
+      </p:nvGrpSpPr>
+      <p:grpSpPr/>
+      <p:sp>
+        <p:nvSpPr>
+          <p:cNvPr id="2" name="Rectangle 1"/>
+          <p:cNvSpPr/>
+          <p:nvPr/>
+        </p:nvSpPr>
+        <p:spPr>
+          <a:xfrm>
+            <a:off x="0" y="0"/>
+            <a:ext cx="12191695" cy="594360"/>
+          </a:xfrm>
+          <a:prstGeom prst="rect">
+            <a:avLst/>
+          </a:prstGeom>
+          <a:solidFill>
+            <a:srgbClr val="0B1F33"/>
+          </a:solidFill>
+          <a:ln>
+            <a:solidFill>
+              <a:srgbClr val="0B1F33"/>
+            </a:solidFill>
+          </a:ln>
+        </p:spPr>
+        <p:style>
+          <a:lnRef idx="1">
+            <a:schemeClr val="accent1"/>
+          </a:lnRef>
+          <a:fillRef idx="3">
+            <a:schemeClr val="accent1"/>
+          </a:fillRef>
+          <a:effectRef idx="2">
+            <a:schemeClr val="accent1"/>
+          </a:effectRef>
+          <a:fontRef idx="minor">
+            <a:schemeClr val="lt1"/>
+          </a:fontRef>
+        </p:style>
+        <p:txBody>
+          <a:bodyPr rtlCol="0" anchor="ctr"/>
+          <a:lstStyle/>
+          <a:p>
+            <a:pPr algn="ctr"/>
+          </a:p>
+        </p:txBody>
+      </p:sp>
+      <p:sp>
+        <p:nvSpPr>
+          <p:cNvPr id="3" name="Rectangle 2"/>
+          <p:cNvSpPr/>
+          <p:nvPr/>
+        </p:nvSpPr>
+        <p:spPr>
+          <a:xfrm>
+            <a:off x="0" y="594360"/>
+            <a:ext cx="1234440" cy="109728"/>
+          </a:xfrm>
+          <a:prstGeom prst="rect">
+            <a:avLst/>
+          </a:prstGeom>
+          <a:solidFill>
+            <a:srgbClr val="F97316"/>
+          </a:solidFill>
+          <a:ln>
+            <a:solidFill>
+              <a:srgbClr val="F97316"/>
+            </a:solidFill>
+          </a:ln>
+        </p:spPr>
+        <p:style>
+          <a:lnRef idx="1">
+            <a:schemeClr val="accent1"/>
+          </a:lnRef>
+          <a:fillRef idx="3">
+            <a:schemeClr val="accent1"/>
+          </a:fillRef>
+          <a:effectRef idx="2">
+            <a:schemeClr val="accent1"/>
+          </a:effectRef>
+          <a:fontRef idx="minor">
+            <a:schemeClr val="lt1"/>
+          </a:fontRef>
+        </p:style>
+        <p:txBody>
+          <a:bodyPr rtlCol="0" anchor="ctr"/>
+          <a:lstStyle/>
+          <a:p>
+            <a:pPr algn="ctr"/>
+          </a:p>
+        </p:txBody>
+      </p:sp>
+      <p:sp>
+        <p:nvSpPr>
+          <p:cNvPr id="4" name="TextBox 3"/>
+          <p:cNvSpPr txBox="1"/>
+          <p:nvPr/>
+        </p:nvSpPr>
+        <p:spPr>
+          <a:xfrm>
+            <a:off x="502920" y="109728"/>
+            <a:ext cx="9326880" cy="292608"/>
+          </a:xfrm>
+          <a:prstGeom prst="rect">
+            <a:avLst/>
+          </a:prstGeom>
+          <a:noFill/>
+        </p:spPr>
+        <p:txBody>
+          <a:bodyPr wrap="square" anchor="t">
+            <a:spAutoFit/>
+          </a:bodyPr>
+          <a:lstStyle/>
+          <a:p>
+            <a:pPr algn="l"/>
+            <a:r>
+              <a:rPr sz="2600" b="1">
+                <a:solidFill>
+                  <a:srgbClr val="FFFFFF"/>
+                </a:solidFill>
+                <a:latin typeface="Aptos"/>
+              </a:rPr>
+              <a:t>Trainer Tips</a:t>
+            </a:r>
+          </a:p>
+        </p:txBody>
+      </p:sp>
+      <p:sp>
+        <p:nvSpPr>
+          <p:cNvPr id="5" name="TextBox 4"/>
+          <p:cNvSpPr txBox="1"/>
+          <p:nvPr/>
+        </p:nvSpPr>
+        <p:spPr>
+          <a:xfrm>
+            <a:off x="8503920" y="182880"/>
+            <a:ext cx="3108960" cy="228600"/>
+          </a:xfrm>
+          <a:prstGeom prst="rect">
+            <a:avLst/>
+          </a:prstGeom>
+          <a:noFill/>
+        </p:spPr>
+        <p:txBody>
+          <a:bodyPr wrap="square" anchor="t">
+            <a:spAutoFit/>
+          </a:bodyPr>
+          <a:lstStyle/>
+          <a:p>
+            <a:pPr algn="r"/>
+            <a:r>
+              <a:rPr sz="1100" b="0">
+                <a:solidFill>
+                  <a:srgbClr val="FFFFFF"/>
+                </a:solidFill>
+                <a:latin typeface="Aptos"/>
+              </a:rPr>
+              <a:t>Field Rep Registration and Login</a:t>
+            </a:r>
+          </a:p>
+        </p:txBody>
+      </p:sp>
+      <p:sp>
+        <p:nvSpPr>
+          <p:cNvPr id="6" name="Rounded Rectangle 5"/>
+          <p:cNvSpPr/>
+          <p:nvPr/>
+        </p:nvSpPr>
+        <p:spPr>
+          <a:xfrm>
+            <a:off x="640080" y="1188720"/>
+            <a:ext cx="10972800" cy="4389120"/>
+          </a:xfrm>
+          <a:prstGeom prst="roundRect">
+            <a:avLst/>
+          </a:prstGeom>
+          <a:solidFill>
+            <a:srgbClr val="FFFFFF"/>
+          </a:solidFill>
+          <a:ln>
+            <a:solidFill>
+              <a:srgbClr val="E2E8F0"/>
+            </a:solidFill>
+          </a:ln>
+        </p:spPr>
+        <p:style>
+          <a:lnRef idx="1">
+            <a:schemeClr val="accent1"/>
+          </a:lnRef>
+          <a:fillRef idx="3">
+            <a:schemeClr val="accent1"/>
+          </a:fillRef>
+          <a:effectRef idx="2">
+            <a:schemeClr val="accent1"/>
+          </a:effectRef>
+          <a:fontRef idx="minor">
+            <a:schemeClr val="lt1"/>
+          </a:fontRef>
+        </p:style>
+        <p:txBody>
+          <a:bodyPr rtlCol="0" anchor="ctr"/>
+          <a:lstStyle/>
+          <a:p>
+            <a:pPr algn="ctr"/>
+          </a:p>
+        </p:txBody>
+      </p:sp>
+      <p:sp>
+        <p:nvSpPr>
+          <p:cNvPr id="7" name="TextBox 6"/>
+          <p:cNvSpPr txBox="1"/>
+          <p:nvPr/>
+        </p:nvSpPr>
+        <p:spPr>
+          <a:xfrm>
+            <a:off x="914400" y="1463040"/>
+            <a:ext cx="2286000" cy="274320"/>
+          </a:xfrm>
+          <a:prstGeom prst="rect">
+            <a:avLst/>
+          </a:prstGeom>
+          <a:noFill/>
+        </p:spPr>
+        <p:txBody>
+          <a:bodyPr wrap="square" anchor="t">
+            <a:spAutoFit/>
+          </a:bodyPr>
+          <a:lstStyle/>
+          <a:p>
+            <a:pPr algn="l"/>
+            <a:r>
+              <a:rPr sz="1400" b="1">
+                <a:solidFill>
+                  <a:srgbClr val="14B8A6"/>
+                </a:solidFill>
+                <a:latin typeface="Aptos"/>
+              </a:rPr>
+              <a:t>Facilitation notes</a:t>
+            </a:r>
+          </a:p>
+        </p:txBody>
+      </p:sp>
+      <p:sp>
+        <p:nvSpPr>
+          <p:cNvPr id="8" name="TextBox 7"/>
+          <p:cNvSpPr txBox="1"/>
+          <p:nvPr/>
+        </p:nvSpPr>
+        <p:spPr>
+          <a:xfrm>
+            <a:off x="914400" y="1828800"/>
+            <a:ext cx="10241280" cy="3017520"/>
+          </a:xfrm>
+          <a:prstGeom prst="rect">
+            <a:avLst/>
+          </a:prstGeom>
+          <a:noFill/>
+        </p:spPr>
+        <p:txBody>
+          <a:bodyPr wrap="square">
+            <a:spAutoFit/>
+          </a:bodyPr>
+          <a:lstStyle/>
+          <a:p>
+            <a:pPr algn="l"/>
+            <a:r>
+              <a:rPr sz="2200">
+                <a:solidFill>
+                  <a:srgbClr val="102A43"/>
+                </a:solidFill>
+                <a:latin typeface="Aptos"/>
+              </a:rPr>
+              <a:t>Lead with the Gmail/manual screen because it reflects the current launch path most accurately.</a:t>
+            </a:r>
+          </a:p>
+          <a:p>
+            <a:pPr algn="l"/>
+            <a:r>
+              <a:rPr sz="2200">
+                <a:solidFill>
+                  <a:srgbClr val="102A43"/>
+                </a:solidFill>
+                <a:latin typeface="Aptos"/>
+              </a:rPr>
+              <a:t>Show the forgot-password screen only briefly unless the session is specifically about support or rep onboarding recovery.</a:t>
+            </a:r>
+          </a:p>
+          <a:p>
+            <a:pPr algn="l"/>
+            <a:r>
+              <a:rPr sz="2200">
+                <a:solidFill>
+                  <a:srgbClr val="102A43"/>
+                </a:solidFill>
+                <a:latin typeface="Aptos"/>
+              </a:rPr>
+              <a:t>Keep the rep deck practical: explain the legacy redirects once, then spend the rest of the time on the live login and share flow.</a:t>
+            </a:r>
+          </a:p>
+        </p:txBody>
+      </p:sp>
+      <p:sp>
+        <p:nvSpPr>
+          <p:cNvPr id="9" name="TextBox 8"/>
+          <p:cNvSpPr txBox="1"/>
+          <p:nvPr/>
+        </p:nvSpPr>
+        <p:spPr>
+          <a:xfrm>
+            <a:off x="914400" y="5257800"/>
+            <a:ext cx="10058400" cy="365760"/>
+          </a:xfrm>
+          <a:prstGeom prst="rect">
+            <a:avLst/>
+          </a:prstGeom>
+          <a:noFill/>
+        </p:spPr>
+        <p:txBody>
+          <a:bodyPr wrap="square" anchor="t">
+            <a:spAutoFit/>
+          </a:bodyPr>
+          <a:lstStyle/>
+          <a:p>
+            <a:pPr algn="l"/>
+            <a:r>
+              <a:rPr sz="1100" b="0">
+                <a:solidFill>
+                  <a:srgbClr val="52667A"/>
+                </a:solidFill>
+                <a:latin typeface="Aptos"/>
+              </a:rPr>
+              <a:t>Related documents: docs/product-user-flows/07-field-rep-sharing-and-doctor-bulk-upload.md, backend/sharing_management/views.py, backend/sharing_management/templates/sharing_management/fieldrep_gmail_login.html</a:t>
+            </a:r>
+          </a:p>
+        </p:txBody>
+      </p:sp>
+      <p:sp>
+        <p:nvSpPr>
+          <p:cNvPr id="10" name="TextBox 9"/>
+          <p:cNvSpPr txBox="1"/>
+          <p:nvPr/>
+        </p:nvSpPr>
+        <p:spPr>
+          <a:xfrm>
+            <a:off x="502920" y="6400800"/>
+            <a:ext cx="10972800" cy="182880"/>
+          </a:xfrm>
+          <a:prstGeom prst="rect">
+            <a:avLst/>
+          </a:prstGeom>
+          <a:noFill/>
+        </p:spPr>
+        <p:txBody>
+          <a:bodyPr wrap="square" anchor="t">
+            <a:spAutoFit/>
+          </a:bodyPr>
+          <a:lstStyle/>
+          <a:p>
+            <a:pPr algn="l"/>
+            <a:r>
+              <a:rPr sz="1000" b="0">
+                <a:solidFill>
+                  <a:srgbClr val="52667A"/>
+                </a:solidFill>
+                <a:latin typeface="Aptos"/>
+              </a:rPr>
+              <a:t>Validated against the current public rep-access screens on 2026-04-23; legacy registration routes now documented as redirects into Gmail/manual login.</a:t>
+            </a:r>
+          </a:p>
+        </p:txBody>
+      </p:sp>
+    </p:spTree>
+  </p:cSld>
+  <p:clrMapOvr>
+    <a:masterClrMapping/>
+  </p:clrMapOvr>
+</p:sld>
+</file>
+
+<file path=ppt/slides/slide9.xml><?xml version="1.0" encoding="utf-8"?>
 <p:sld xmlns:a="http://schemas.openxmlformats.org/drawingml/2006/main" xmlns:p="http://schemas.openxmlformats.org/presentationml/2006/main" xmlns:r="http://schemas.openxmlformats.org/officeDocument/2006/relationships">
   <p:cSld>
     <p:bg>
@@ -7729,7 +7899,7 @@
                 </a:solidFill>
                 <a:latin typeface="Aptos"/>
               </a:rPr>
-              <a:t>The difference between email/password, Gmail/manual login, and signed SSO is explained clearly.</a:t>
+              <a:t>The difference between email/password, password recovery, Gmail/manual login, and signed SSO is explained clearly.</a:t>
             </a:r>
           </a:p>
           <a:p>

--- a/output/doc/user-flow-decks/06-field-rep-registration-and-login.pptx
+++ b/output/doc/user-flow-decks/06-field-rep-registration-and-login.pptx
@@ -11,9 +11,6 @@
     <p:sldId id="259" r:id="rId10"/>
     <p:sldId id="260" r:id="rId11"/>
     <p:sldId id="261" r:id="rId12"/>
-    <p:sldId id="262" r:id="rId13"/>
-    <p:sldId id="263" r:id="rId14"/>
-    <p:sldId id="264" r:id="rId15"/>
   </p:sldIdLst>
   <p:sldSz cx="12191695" cy="6858000" type="screen4x3"/>
   <p:notesSz cx="6858000" cy="9144000"/>
@@ -3179,7 +3176,7 @@
                 </a:solidFill>
                 <a:latin typeface="Aptos"/>
               </a:rPr>
-              <a:t>Field Rep Registration and Login</a:t>
+              <a:t>Field Rep Login</a:t>
             </a:r>
           </a:p>
         </p:txBody>
@@ -3214,7 +3211,7 @@
                 </a:solidFill>
                 <a:latin typeface="Aptos"/>
               </a:rPr>
-              <a:t>Explain the current public field-rep access screens, including the legacy compatibility redirects, the password login and recovery screens, and the active Gmail/manual or SSO login path.</a:t>
+              <a:t>Explain the live public Field Rep login screen and how campaign-scoped reps sign in with Email ID and Field Rep ID.</a:t>
             </a:r>
           </a:p>
         </p:txBody>
@@ -3430,7 +3427,7 @@
                 </a:solidFill>
                 <a:latin typeface="Aptos"/>
               </a:rPr>
-              <a:t>Public routes under</a:t>
+              <a:t>Campaign-scoped Field Rep</a:t>
             </a:r>
             <a:br/>
             <a:r>
@@ -3440,7 +3437,7 @@
                 </a:solidFill>
                 <a:latin typeface="Aptos"/>
               </a:rPr>
-              <a:t>`/share/fieldrep-register/`,</a:t>
+              <a:t>login route:</a:t>
             </a:r>
             <a:br/>
             <a:r>
@@ -3450,7 +3447,7 @@
                 </a:solidFill>
                 <a:latin typeface="Aptos"/>
               </a:rPr>
-              <a:t>`/share/fieldrep-create-</a:t>
+              <a:t>`/share/fieldrep-gmail-login</a:t>
             </a:r>
             <a:br/>
             <a:r>
@@ -3460,7 +3457,7 @@
                 </a:solidFill>
                 <a:latin typeface="Aptos"/>
               </a:rPr>
-              <a:t>password/`,</a:t>
+              <a:t>/?campaign=&lt;brand_campaign_i</a:t>
             </a:r>
             <a:br/>
             <a:r>
@@ -3470,27 +3467,7 @@
                 </a:solidFill>
                 <a:latin typeface="Aptos"/>
               </a:rPr>
-              <a:t>`/share/fieldrep-login/`,</a:t>
-            </a:r>
-            <a:br/>
-            <a:r>
-              <a:rPr sz="1300">
-                <a:solidFill>
-                  <a:srgbClr val="52667A"/>
-                </a:solidFill>
-                <a:latin typeface="Aptos"/>
-              </a:rPr>
-              <a:t>and `/share/fieldrep-gmail-</a:t>
-            </a:r>
-            <a:br/>
-            <a:r>
-              <a:rPr sz="1300">
-                <a:solidFill>
-                  <a:srgbClr val="52667A"/>
-                </a:solidFill>
-                <a:latin typeface="Aptos"/>
-              </a:rPr>
-              <a:t>login/`.</a:t>
+              <a:t>d&gt;`.</a:t>
             </a:r>
           </a:p>
         </p:txBody>
@@ -3676,7 +3653,7 @@
                 </a:solidFill>
                 <a:latin typeface="Aptos"/>
               </a:rPr>
-              <a:t>Field Rep Registration and Login</a:t>
+              <a:t>Field Rep Login</a:t>
             </a:r>
           </a:p>
         </p:txBody>
@@ -3906,7 +3883,7 @@
                 </a:solidFill>
                 <a:latin typeface="Aptos"/>
               </a:rPr>
-              <a:t>Public routes under `/share/fieldrep-register/`, `/share/fieldrep-create-password/`, `/share/fieldrep-login/`, and `/share/fieldrep-gmail-login/`.</a:t>
+              <a:t>Campaign-scoped Field Rep login route: `/share/fieldrep-gmail-login/?campaign=&lt;brand_campaign_id&gt;`.</a:t>
             </a:r>
           </a:p>
         </p:txBody>
@@ -4021,7 +3998,7 @@
                 </a:solidFill>
                 <a:latin typeface="Aptos"/>
               </a:rPr>
-              <a:t>Explain the current public field-rep access screens, including the legacy compatibility redirects, the password login and recovery screens, and the active Gmail/manual or SSO login path.</a:t>
+              <a:t>Explain the live public Field Rep login screen and how campaign-scoped reps sign in with Email ID and Field Rep ID.</a:t>
             </a:r>
           </a:p>
         </p:txBody>
@@ -4136,7 +4113,7 @@
                 </a:solidFill>
                 <a:latin typeface="Aptos"/>
               </a:rPr>
-              <a:t>The legacy registration and create-password routes no longer collect new credentials; they redirect into the Gmail/manual login screen with an informational banner.</a:t>
+              <a:t>Field reps are registered through the campaign manager or staff-admin workflow before they ever reach the public login page.</a:t>
             </a:r>
           </a:p>
           <a:p>
@@ -4148,7 +4125,7 @@
                 </a:solidFill>
                 <a:latin typeface="Aptos"/>
               </a:rPr>
-              <a:t>The product still supports both email/password login and Brand Specific Field ID plus Email ID login patterns.</a:t>
+              <a:t>Public training now focuses on one live login pattern: Email ID plus Brand Specific Field ID.</a:t>
             </a:r>
           </a:p>
           <a:p>
@@ -4160,7 +4137,7 @@
                 </a:solidFill>
                 <a:latin typeface="Aptos"/>
               </a:rPr>
-              <a:t>Password recovery is still live through the forgot-password and reset-password flow backed by the rep's configured security question.</a:t>
+              <a:t>Campaign context can travel in the query string or session so a rep is taken directly into the correct campaign after login.</a:t>
             </a:r>
           </a:p>
           <a:p>
@@ -4172,19 +4149,7 @@
                 </a:solidFill>
                 <a:latin typeface="Aptos"/>
               </a:rPr>
-              <a:t>Signed SSO can also auto-complete the Gmail login flow by trusting the master Field Rep ID inside the URL or JWT payload.</a:t>
-            </a:r>
-          </a:p>
-          <a:p>
-            <a:pPr algn="l"/>
-            <a:r>
-              <a:rPr sz="1800">
-                <a:solidFill>
-                  <a:srgbClr val="102A43"/>
-                </a:solidFill>
-                <a:latin typeface="Aptos"/>
-              </a:rPr>
-              <a:t>Campaign context can travel in the query string or session so a rep is taken directly into the correct campaign after login.</a:t>
+              <a:t>Successful login takes the rep straight into the campaign share page used in workflow 07.</a:t>
             </a:r>
           </a:p>
           <a:p>
@@ -4382,7 +4347,7 @@
                 </a:solidFill>
                 <a:latin typeface="Aptos"/>
               </a:rPr>
-              <a:t>Step 1: Open the legacy registration route and observe the redirect</a:t>
+              <a:t>Step 1: Open the campaign-scoped Field Rep login page</a:t>
             </a:r>
           </a:p>
         </p:txBody>
@@ -4417,7 +4382,7 @@
                 </a:solidFill>
                 <a:latin typeface="Aptos"/>
               </a:rPr>
-              <a:t>Field Rep Registration and Login</a:t>
+              <a:t>Field Rep Login</a:t>
             </a:r>
           </a:p>
         </p:txBody>
@@ -4526,7 +4491,7 @@
                 </a:solidFill>
                 <a:latin typeface="Aptos"/>
               </a:rPr>
-              <a:t>Launch the campaign-scoped registration URL that older launch materials may still reference.</a:t>
+              <a:t>Launch the public Field Rep login URL for the selected campaign.</a:t>
             </a:r>
           </a:p>
           <a:p>
@@ -4567,7 +4532,7 @@
                 </a:solidFill>
                 <a:latin typeface="Aptos"/>
               </a:rPr>
-              <a:t>The Gmail/manual login page with an info banner stating that Field Rep registration is no longer required.</a:t>
+              <a:t>A campaign-scoped login form labeled Brand Specific Field ID and Email ID, along with the campaign context and the floating support chatbot.</a:t>
             </a:r>
           </a:p>
           <a:p>
@@ -4608,7 +4573,7 @@
                 </a:solidFill>
                 <a:latin typeface="Aptos"/>
               </a:rPr>
-              <a:t>This explains the current product behavior when older documentation or bookmarks still point to the registration route.</a:t>
+              <a:t>This is the live entry point field reps use after they have already been registered in the campaign manager workflow.</a:t>
             </a:r>
           </a:p>
           <a:p>
@@ -4649,7 +4614,7 @@
                 </a:solidFill>
                 <a:latin typeface="Aptos"/>
               </a:rPr>
-              <a:t>The rep lands on the active login surface instead of a self-service sign-up form.</a:t>
+              <a:t>The rep reaches the correct login surface for the campaign they need to work on.</a:t>
             </a:r>
           </a:p>
           <a:p>
@@ -4690,7 +4655,7 @@
                 </a:solidFill>
                 <a:latin typeface="Aptos"/>
               </a:rPr>
-              <a:t>Call this out explicitly during training so the audience understands that the route is compatibility-only and not a live onboarding wizard anymore.</a:t>
+              <a:t>Set the expectation clearly: this page is for login only. Registration and rep setup happen earlier in the admin workflow covered in workflow 04.</a:t>
             </a:r>
           </a:p>
         </p:txBody>
@@ -4770,14 +4735,14 @@
                 </a:solidFill>
                 <a:latin typeface="Aptos"/>
               </a:rPr>
-              <a:t>Legacy registration URL redirecting into the current Gmail/manual login page.</a:t>
+              <a:t>Current Field Rep login page used for campaign-scoped rep access.</a:t>
             </a:r>
           </a:p>
         </p:txBody>
       </p:sp>
       <p:pic>
         <p:nvPicPr>
-          <p:cNvPr id="10" name="Picture 9" descr="fieldrep-register.png"/>
+          <p:cNvPr id="10" name="Picture 9" descr="fieldrep-gmail-login.png"/>
           <p:cNvPicPr>
             <a:picLocks noChangeAspect="1"/>
           </p:cNvPicPr>
@@ -4829,7 +4794,7 @@
                 </a:solidFill>
                 <a:latin typeface="Aptos"/>
               </a:rPr>
-              <a:t>The informational banner and redirected login screen shown instead of the old registration form.</a:t>
+              <a:t>The Email ID and Brand Specific Field ID fields that lead into the share experience.</a:t>
             </a:r>
           </a:p>
         </p:txBody>
@@ -4864,7 +4829,7 @@
                 </a:solidFill>
                 <a:latin typeface="Aptos"/>
               </a:rPr>
-              <a:t>Screenshot asset: docs/product-user-flows/assets/field-rep-registration-and-login/fieldrep-register.png</a:t>
+              <a:t>Screenshot asset: docs/product-user-flows/assets/field-rep-registration-and-login/fieldrep-gmail-login.png</a:t>
             </a:r>
           </a:p>
         </p:txBody>
@@ -5015,7 +4980,7 @@
                 </a:solidFill>
                 <a:latin typeface="Aptos"/>
               </a:rPr>
-              <a:t>Step 2: Open the legacy create-password route and confirm the new handoff</a:t>
+              <a:t>Step 2: Sign in with Email ID and Field Rep ID</a:t>
             </a:r>
           </a:p>
         </p:txBody>
@@ -5050,7 +5015,7 @@
                 </a:solidFill>
                 <a:latin typeface="Aptos"/>
               </a:rPr>
-              <a:t>Field Rep Registration and Login</a:t>
+              <a:t>Field Rep Login</a:t>
             </a:r>
           </a:p>
         </p:txBody>
@@ -5159,7 +5124,7 @@
                 </a:solidFill>
                 <a:latin typeface="Aptos"/>
               </a:rPr>
-              <a:t>Launch the create-password URL, optionally carrying the rep email, Field ID, and campaign in the query string.</a:t>
+              <a:t>Enter the Email ID and Brand Specific Field ID exactly as assigned for the campaign, then submit the form.</a:t>
             </a:r>
           </a:p>
           <a:p>
@@ -5200,7 +5165,7 @@
                 </a:solidFill>
                 <a:latin typeface="Aptos"/>
               </a:rPr>
-              <a:t>The same Gmail/manual login page, usually with the email and Field ID prefilled and the same informational banner.</a:t>
+              <a:t>The same login card until submission succeeds, after which the rep is redirected into the campaign share screen with the selected campaign already in context.</a:t>
             </a:r>
           </a:p>
           <a:p>
@@ -5241,7 +5206,7 @@
                 </a:solidFill>
                 <a:latin typeface="Aptos"/>
               </a:rPr>
-              <a:t>This shows how older password-setup links now preserve context while handing the rep into the supported login path.</a:t>
+              <a:t>These two identifiers are the only public-login fields the rep needs for the live workflow.</a:t>
             </a:r>
           </a:p>
           <a:p>
@@ -5282,7 +5247,7 @@
                 </a:solidFill>
                 <a:latin typeface="Aptos"/>
               </a:rPr>
-              <a:t>The rep can continue with the current login flow without losing the campaign or identifier context.</a:t>
+              <a:t>The rep lands on the share page and is ready to start sending collateral.</a:t>
             </a:r>
           </a:p>
           <a:p>
@@ -5323,7 +5288,7 @@
                 </a:solidFill>
                 <a:latin typeface="Aptos"/>
               </a:rPr>
-              <a:t>Use this screen to explain that the product team simplified onboarding: reps are expected to log in, not create a new password from this route.</a:t>
+              <a:t>If login fails, confirm that the rep record exists in the campaign manager dashboard and that the Email ID plus Field Rep ID pair belongs to the same campaign assignment.</a:t>
             </a:r>
           </a:p>
         </p:txBody>
@@ -5403,14 +5368,14 @@
                 </a:solidFill>
                 <a:latin typeface="Aptos"/>
               </a:rPr>
-              <a:t>Legacy create-password URL redirecting into the current login page with preserved identifiers.</a:t>
+              <a:t>Field Rep login page showing the two identifiers required for campaign access.</a:t>
             </a:r>
           </a:p>
         </p:txBody>
       </p:sp>
       <p:pic>
         <p:nvPicPr>
-          <p:cNvPr id="10" name="Picture 9" descr="fieldrep-create-password.png"/>
+          <p:cNvPr id="10" name="Picture 9" descr="fieldrep-gmail-login.png"/>
           <p:cNvPicPr>
             <a:picLocks noChangeAspect="1"/>
           </p:cNvPicPr>
@@ -5462,7 +5427,7 @@
                 </a:solidFill>
                 <a:latin typeface="Aptos"/>
               </a:rPr>
-              <a:t>The redirected Gmail/manual login form with prefilled rep context.</a:t>
+              <a:t>The credential fields and submit action used before the rep is redirected into sharing.</a:t>
             </a:r>
           </a:p>
         </p:txBody>
@@ -5497,7 +5462,7 @@
                 </a:solidFill>
                 <a:latin typeface="Aptos"/>
               </a:rPr>
-              <a:t>Screenshot asset: docs/product-user-flows/assets/field-rep-registration-and-login/fieldrep-create-password.png</a:t>
+              <a:t>Screenshot asset: docs/product-user-flows/assets/field-rep-registration-and-login/fieldrep-gmail-login.png</a:t>
             </a:r>
           </a:p>
         </p:txBody>
@@ -5642,13 +5607,13 @@
           <a:p>
             <a:pPr algn="l"/>
             <a:r>
-              <a:rPr sz="1800" b="1">
+              <a:rPr sz="2600" b="1">
                 <a:solidFill>
                   <a:srgbClr val="FFFFFF"/>
                 </a:solidFill>
                 <a:latin typeface="Aptos"/>
               </a:rPr>
-              <a:t>Step 3: Review the direct email/password login screen</a:t>
+              <a:t>Trainer Tips</a:t>
             </a:r>
           </a:p>
         </p:txBody>
@@ -5683,7 +5648,7 @@
                 </a:solidFill>
                 <a:latin typeface="Aptos"/>
               </a:rPr>
-              <a:t>Field Rep Registration and Login</a:t>
+              <a:t>Field Rep Login</a:t>
             </a:r>
           </a:p>
         </p:txBody>
@@ -5696,8 +5661,8 @@
         </p:nvSpPr>
         <p:spPr>
           <a:xfrm>
-            <a:off x="502920" y="914400"/>
-            <a:ext cx="4572000" cy="5212080"/>
+            <a:off x="640080" y="1188720"/>
+            <a:ext cx="10972800" cy="4389120"/>
           </a:xfrm>
           <a:prstGeom prst="roundRect">
             <a:avLst/>
@@ -5741,8 +5706,8 @@
         </p:nvSpPr>
         <p:spPr>
           <a:xfrm>
-            <a:off x="749808" y="1097280"/>
-            <a:ext cx="3931920" cy="4754880"/>
+            <a:off x="914400" y="1463040"/>
+            <a:ext cx="2286000" cy="274320"/>
           </a:xfrm>
           <a:prstGeom prst="rect">
             <a:avLst/>
@@ -5750,259 +5715,80 @@
           <a:noFill/>
         </p:spPr>
         <p:txBody>
-          <a:bodyPr wrap="square" lIns="0" rIns="0" tIns="0" bIns="0">
+          <a:bodyPr wrap="square" anchor="t">
             <a:spAutoFit/>
           </a:bodyPr>
           <a:lstStyle/>
           <a:p>
-            <a:pPr algn="l">
-              <a:spcBef>
-                <a:spcPts val="0"/>
-              </a:spcBef>
-              <a:spcAft>
-                <a:spcPts val="200"/>
-              </a:spcAft>
-            </a:pPr>
-            <a:r>
-              <a:rPr sz="1200" b="1">
+            <a:pPr algn="l"/>
+            <a:r>
+              <a:rPr sz="1400" b="1">
                 <a:solidFill>
                   <a:srgbClr val="14B8A6"/>
                 </a:solidFill>
                 <a:latin typeface="Aptos"/>
               </a:rPr>
-              <a:t>User action</a:t>
-            </a:r>
-          </a:p>
-          <a:p>
-            <a:pPr algn="l">
-              <a:lnSpc>
-                <a:spcPct val="110000"/>
-              </a:lnSpc>
-              <a:spcBef>
-                <a:spcPts val="0"/>
-              </a:spcBef>
-              <a:spcAft>
-                <a:spcPts val="800"/>
-              </a:spcAft>
-            </a:pPr>
-            <a:r>
-              <a:rPr sz="1300">
+              <a:t>Facilitation notes</a:t>
+            </a:r>
+          </a:p>
+        </p:txBody>
+      </p:sp>
+      <p:sp>
+        <p:nvSpPr>
+          <p:cNvPr id="8" name="TextBox 7"/>
+          <p:cNvSpPr txBox="1"/>
+          <p:nvPr/>
+        </p:nvSpPr>
+        <p:spPr>
+          <a:xfrm>
+            <a:off x="914400" y="1828800"/>
+            <a:ext cx="10241280" cy="3017520"/>
+          </a:xfrm>
+          <a:prstGeom prst="rect">
+            <a:avLst/>
+          </a:prstGeom>
+          <a:noFill/>
+        </p:spPr>
+        <p:txBody>
+          <a:bodyPr wrap="square">
+            <a:spAutoFit/>
+          </a:bodyPr>
+          <a:lstStyle/>
+          <a:p>
+            <a:pPr algn="l"/>
+            <a:r>
+              <a:rPr sz="2200">
                 <a:solidFill>
                   <a:srgbClr val="102A43"/>
                 </a:solidFill>
                 <a:latin typeface="Aptos"/>
               </a:rPr>
-              <a:t>Open the field-rep login page tied to the active campaign.</a:t>
-            </a:r>
-          </a:p>
-          <a:p>
-            <a:pPr algn="l">
-              <a:spcBef>
-                <a:spcPts val="0"/>
-              </a:spcBef>
-              <a:spcAft>
-                <a:spcPts val="200"/>
-              </a:spcAft>
-            </a:pPr>
-            <a:r>
-              <a:rPr sz="1200" b="1">
-                <a:solidFill>
-                  <a:srgbClr val="14B8A6"/>
-                </a:solidFill>
-                <a:latin typeface="Aptos"/>
-              </a:rPr>
-              <a:t>What appears on screen</a:t>
-            </a:r>
-          </a:p>
-          <a:p>
-            <a:pPr algn="l">
-              <a:lnSpc>
-                <a:spcPct val="110000"/>
-              </a:lnSpc>
-              <a:spcBef>
-                <a:spcPts val="0"/>
-              </a:spcBef>
-              <a:spcAft>
-                <a:spcPts val="800"/>
-              </a:spcAft>
-            </a:pPr>
-            <a:r>
-              <a:rPr sz="1300">
+              <a:t>Anchor the training on the actual two-field login pattern instead of describing historical public registration routes.</a:t>
+            </a:r>
+          </a:p>
+          <a:p>
+            <a:pPr algn="l"/>
+            <a:r>
+              <a:rPr sz="2200">
                 <a:solidFill>
                   <a:srgbClr val="102A43"/>
                 </a:solidFill>
                 <a:latin typeface="Aptos"/>
               </a:rPr>
-              <a:t>A focused login form that asks for email and password, preserves campaign context, and exposes a `Forgot Password?` link below the primary login button.</a:t>
-            </a:r>
-          </a:p>
-          <a:p>
-            <a:pPr algn="l">
-              <a:spcBef>
-                <a:spcPts val="0"/>
-              </a:spcBef>
-              <a:spcAft>
-                <a:spcPts val="200"/>
-              </a:spcAft>
-            </a:pPr>
-            <a:r>
-              <a:rPr sz="1200" b="1">
-                <a:solidFill>
-                  <a:srgbClr val="14B8A6"/>
-                </a:solidFill>
-                <a:latin typeface="Aptos"/>
-              </a:rPr>
-              <a:t>Why it matters</a:t>
-            </a:r>
-          </a:p>
-          <a:p>
-            <a:pPr algn="l">
-              <a:lnSpc>
-                <a:spcPct val="110000"/>
-              </a:lnSpc>
-              <a:spcBef>
-                <a:spcPts val="0"/>
-              </a:spcBef>
-              <a:spcAft>
-                <a:spcPts val="800"/>
-              </a:spcAft>
-            </a:pPr>
-            <a:r>
-              <a:rPr sz="1300">
+              <a:t>If the audience asks where reps are created, point them back to workflow 04 rather than expanding this deck into admin setup.</a:t>
+            </a:r>
+          </a:p>
+          <a:p>
+            <a:pPr algn="l"/>
+            <a:r>
+              <a:rPr sz="2200">
                 <a:solidFill>
                   <a:srgbClr val="102A43"/>
                 </a:solidFill>
                 <a:latin typeface="Aptos"/>
               </a:rPr>
-              <a:t>This is the most straightforward rep-login method for routine use.</a:t>
-            </a:r>
-          </a:p>
-          <a:p>
-            <a:pPr algn="l">
-              <a:spcBef>
-                <a:spcPts val="0"/>
-              </a:spcBef>
-              <a:spcAft>
-                <a:spcPts val="200"/>
-              </a:spcAft>
-            </a:pPr>
-            <a:r>
-              <a:rPr sz="1200" b="1">
-                <a:solidFill>
-                  <a:srgbClr val="14B8A6"/>
-                </a:solidFill>
-                <a:latin typeface="Aptos"/>
-              </a:rPr>
-              <a:t>Expected result</a:t>
-            </a:r>
-          </a:p>
-          <a:p>
-            <a:pPr algn="l">
-              <a:lnSpc>
-                <a:spcPct val="110000"/>
-              </a:lnSpc>
-              <a:spcBef>
-                <a:spcPts val="0"/>
-              </a:spcBef>
-              <a:spcAft>
-                <a:spcPts val="800"/>
-              </a:spcAft>
-            </a:pPr>
-            <a:r>
-              <a:rPr sz="1300">
-                <a:solidFill>
-                  <a:srgbClr val="102A43"/>
-                </a:solidFill>
-                <a:latin typeface="Aptos"/>
-              </a:rPr>
-              <a:t>The rep knows where to enter their standard credentials when the campaign requires the password flow.</a:t>
-            </a:r>
-          </a:p>
-          <a:p>
-            <a:pPr algn="l">
-              <a:spcBef>
-                <a:spcPts val="0"/>
-              </a:spcBef>
-              <a:spcAft>
-                <a:spcPts val="200"/>
-              </a:spcAft>
-            </a:pPr>
-            <a:r>
-              <a:rPr sz="1200" b="1">
-                <a:solidFill>
-                  <a:srgbClr val="F97316"/>
-                </a:solidFill>
-                <a:latin typeface="Aptos"/>
-              </a:rPr>
-              <a:t>Trainer note</a:t>
-            </a:r>
-          </a:p>
-          <a:p>
-            <a:pPr algn="l">
-              <a:lnSpc>
-                <a:spcPct val="110000"/>
-              </a:lnSpc>
-              <a:spcBef>
-                <a:spcPts val="0"/>
-              </a:spcBef>
-              <a:spcAft>
-                <a:spcPts val="0"/>
-              </a:spcAft>
-            </a:pPr>
-            <a:r>
-              <a:rPr sz="1200">
-                <a:solidFill>
-                  <a:srgbClr val="52667A"/>
-                </a:solidFill>
-                <a:latin typeface="Aptos"/>
-              </a:rPr>
-              <a:t>If the audience asks which login path to use, clarify what the current campaign rollout recommends before moving into the next workflow deck.</a:t>
-            </a:r>
-          </a:p>
-        </p:txBody>
-      </p:sp>
-      <p:sp>
-        <p:nvSpPr>
-          <p:cNvPr id="8" name="Rounded Rectangle 7"/>
-          <p:cNvSpPr/>
-          <p:nvPr/>
-        </p:nvSpPr>
-        <p:spPr>
-          <a:xfrm>
-            <a:off x="5303520" y="914400"/>
-            <a:ext cx="6355080" cy="5212080"/>
-          </a:xfrm>
-          <a:prstGeom prst="roundRect">
-            <a:avLst/>
-          </a:prstGeom>
-          <a:solidFill>
-            <a:srgbClr val="FFFFFF"/>
-          </a:solidFill>
-          <a:ln>
-            <a:solidFill>
-              <a:srgbClr val="E2E8F0"/>
-            </a:solidFill>
-          </a:ln>
-        </p:spPr>
-        <p:style>
-          <a:lnRef idx="1">
-            <a:schemeClr val="accent1"/>
-          </a:lnRef>
-          <a:fillRef idx="3">
-            <a:schemeClr val="accent1"/>
-          </a:fillRef>
-          <a:effectRef idx="2">
-            <a:schemeClr val="accent1"/>
-          </a:effectRef>
-          <a:fontRef idx="minor">
-            <a:schemeClr val="lt1"/>
-          </a:fontRef>
-        </p:style>
-        <p:txBody>
-          <a:bodyPr rtlCol="0" anchor="ctr"/>
-          <a:lstStyle/>
-          <a:p>
-            <a:pPr algn="ctr"/>
+              <a:t>Keep this deck short so the training spends most of its time in the share workflow.</a:t>
+            </a:r>
           </a:p>
         </p:txBody>
       </p:sp>
@@ -6014,8 +5800,8 @@
         </p:nvSpPr>
         <p:spPr>
           <a:xfrm>
-            <a:off x="5577840" y="1097280"/>
-            <a:ext cx="5669280" cy="228600"/>
+            <a:off x="914400" y="5257800"/>
+            <a:ext cx="10058400" cy="365760"/>
           </a:xfrm>
           <a:prstGeom prst="rect">
             <a:avLst/>
@@ -6030,51 +5816,27 @@
           <a:p>
             <a:pPr algn="l"/>
             <a:r>
-              <a:rPr sz="1300" b="1">
-                <a:solidFill>
-                  <a:srgbClr val="14B8A6"/>
-                </a:solidFill>
-                <a:latin typeface="Aptos"/>
-              </a:rPr>
-              <a:t>Email/password field-rep login page for the selected campaign.</a:t>
-            </a:r>
-          </a:p>
-        </p:txBody>
-      </p:sp>
-      <p:pic>
-        <p:nvPicPr>
-          <p:cNvPr id="10" name="Picture 9" descr="fieldrep-login.png"/>
-          <p:cNvPicPr>
-            <a:picLocks noChangeAspect="1"/>
-          </p:cNvPicPr>
-          <p:nvPr/>
-        </p:nvPicPr>
-        <p:blipFill>
-          <a:blip r:embed="rId2"/>
-          <a:stretch>
-            <a:fillRect/>
-          </a:stretch>
-        </p:blipFill>
-        <p:spPr>
-          <a:xfrm>
-            <a:off x="5559552" y="1417320"/>
-            <a:ext cx="5806440" cy="4160520"/>
-          </a:xfrm>
-          <a:prstGeom prst="rect">
-            <a:avLst/>
-          </a:prstGeom>
-        </p:spPr>
-      </p:pic>
-      <p:sp>
-        <p:nvSpPr>
-          <p:cNvPr id="11" name="TextBox 10"/>
+              <a:rPr sz="1100" b="0">
+                <a:solidFill>
+                  <a:srgbClr val="52667A"/>
+                </a:solidFill>
+                <a:latin typeface="Aptos"/>
+              </a:rPr>
+              <a:t>Related documents: docs/product-user-flows/04-admin-field-rep-and-doctor-management.md, docs/product-user-flows/07-field-rep-sharing-and-doctor-bulk-upload.md, backend/sharing_management/views.py, backend/sharing_management/templates/sharing_management/fieldrep_gmail_login.html</a:t>
+            </a:r>
+          </a:p>
+        </p:txBody>
+      </p:sp>
+      <p:sp>
+        <p:nvSpPr>
+          <p:cNvPr id="10" name="TextBox 9"/>
           <p:cNvSpPr txBox="1"/>
           <p:nvPr/>
         </p:nvSpPr>
         <p:spPr>
           <a:xfrm>
-            <a:off x="5577840" y="5669280"/>
-            <a:ext cx="5623560" cy="320040"/>
+            <a:off x="502920" y="6400800"/>
+            <a:ext cx="10972800" cy="182880"/>
           </a:xfrm>
           <a:prstGeom prst="rect">
             <a:avLst/>
@@ -6089,48 +5851,13 @@
           <a:p>
             <a:pPr algn="l"/>
             <a:r>
-              <a:rPr sz="1100" b="0">
+              <a:rPr sz="1000" b="0">
                 <a:solidFill>
                   <a:srgbClr val="52667A"/>
                 </a:solidFill>
                 <a:latin typeface="Aptos"/>
               </a:rPr>
-              <a:t>The direct credential-entry option for field reps.</a:t>
-            </a:r>
-          </a:p>
-        </p:txBody>
-      </p:sp>
-      <p:sp>
-        <p:nvSpPr>
-          <p:cNvPr id="12" name="TextBox 11"/>
-          <p:cNvSpPr txBox="1"/>
-          <p:nvPr/>
-        </p:nvSpPr>
-        <p:spPr>
-          <a:xfrm>
-            <a:off x="502920" y="6400800"/>
-            <a:ext cx="10972800" cy="182880"/>
-          </a:xfrm>
-          <a:prstGeom prst="rect">
-            <a:avLst/>
-          </a:prstGeom>
-          <a:noFill/>
-        </p:spPr>
-        <p:txBody>
-          <a:bodyPr wrap="square" anchor="t">
-            <a:spAutoFit/>
-          </a:bodyPr>
-          <a:lstStyle/>
-          <a:p>
-            <a:pPr algn="l"/>
-            <a:r>
-              <a:rPr sz="1000" b="0">
-                <a:solidFill>
-                  <a:srgbClr val="52667A"/>
-                </a:solidFill>
-                <a:latin typeface="Aptos"/>
-              </a:rPr>
-              <a:t>Screenshot asset: docs/product-user-flows/assets/field-rep-registration-and-login/fieldrep-login.png</a:t>
+              <a:t>Validated against the current public Field Rep login screen on 2026-04-23; registration is documented in the admin workflow instead of the public rep deck.</a:t>
             </a:r>
           </a:p>
         </p:txBody>
@@ -6144,1667 +5871,6 @@
 </file>
 
 <file path=ppt/slides/slide6.xml><?xml version="1.0" encoding="utf-8"?>
-<p:sld xmlns:a="http://schemas.openxmlformats.org/drawingml/2006/main" xmlns:p="http://schemas.openxmlformats.org/presentationml/2006/main" xmlns:r="http://schemas.openxmlformats.org/officeDocument/2006/relationships">
-  <p:cSld>
-    <p:bg>
-      <p:bgPr>
-        <a:solidFill>
-          <a:srgbClr val="F7F8FA"/>
-        </a:solidFill>
-        <a:effectLst/>
-      </p:bgPr>
-    </p:bg>
-    <p:spTree>
-      <p:nvGrpSpPr>
-        <p:cNvPr id="1" name=""/>
-        <p:cNvGrpSpPr/>
-        <p:nvPr/>
-      </p:nvGrpSpPr>
-      <p:grpSpPr/>
-      <p:sp>
-        <p:nvSpPr>
-          <p:cNvPr id="2" name="Rectangle 1"/>
-          <p:cNvSpPr/>
-          <p:nvPr/>
-        </p:nvSpPr>
-        <p:spPr>
-          <a:xfrm>
-            <a:off x="0" y="0"/>
-            <a:ext cx="12191695" cy="594360"/>
-          </a:xfrm>
-          <a:prstGeom prst="rect">
-            <a:avLst/>
-          </a:prstGeom>
-          <a:solidFill>
-            <a:srgbClr val="0B1F33"/>
-          </a:solidFill>
-          <a:ln>
-            <a:solidFill>
-              <a:srgbClr val="0B1F33"/>
-            </a:solidFill>
-          </a:ln>
-        </p:spPr>
-        <p:style>
-          <a:lnRef idx="1">
-            <a:schemeClr val="accent1"/>
-          </a:lnRef>
-          <a:fillRef idx="3">
-            <a:schemeClr val="accent1"/>
-          </a:fillRef>
-          <a:effectRef idx="2">
-            <a:schemeClr val="accent1"/>
-          </a:effectRef>
-          <a:fontRef idx="minor">
-            <a:schemeClr val="lt1"/>
-          </a:fontRef>
-        </p:style>
-        <p:txBody>
-          <a:bodyPr rtlCol="0" anchor="ctr"/>
-          <a:lstStyle/>
-          <a:p>
-            <a:pPr algn="ctr"/>
-          </a:p>
-        </p:txBody>
-      </p:sp>
-      <p:sp>
-        <p:nvSpPr>
-          <p:cNvPr id="3" name="Rectangle 2"/>
-          <p:cNvSpPr/>
-          <p:nvPr/>
-        </p:nvSpPr>
-        <p:spPr>
-          <a:xfrm>
-            <a:off x="0" y="594360"/>
-            <a:ext cx="1234440" cy="109728"/>
-          </a:xfrm>
-          <a:prstGeom prst="rect">
-            <a:avLst/>
-          </a:prstGeom>
-          <a:solidFill>
-            <a:srgbClr val="F97316"/>
-          </a:solidFill>
-          <a:ln>
-            <a:solidFill>
-              <a:srgbClr val="F97316"/>
-            </a:solidFill>
-          </a:ln>
-        </p:spPr>
-        <p:style>
-          <a:lnRef idx="1">
-            <a:schemeClr val="accent1"/>
-          </a:lnRef>
-          <a:fillRef idx="3">
-            <a:schemeClr val="accent1"/>
-          </a:fillRef>
-          <a:effectRef idx="2">
-            <a:schemeClr val="accent1"/>
-          </a:effectRef>
-          <a:fontRef idx="minor">
-            <a:schemeClr val="lt1"/>
-          </a:fontRef>
-        </p:style>
-        <p:txBody>
-          <a:bodyPr rtlCol="0" anchor="ctr"/>
-          <a:lstStyle/>
-          <a:p>
-            <a:pPr algn="ctr"/>
-          </a:p>
-        </p:txBody>
-      </p:sp>
-      <p:sp>
-        <p:nvSpPr>
-          <p:cNvPr id="4" name="TextBox 3"/>
-          <p:cNvSpPr txBox="1"/>
-          <p:nvPr/>
-        </p:nvSpPr>
-        <p:spPr>
-          <a:xfrm>
-            <a:off x="502920" y="109728"/>
-            <a:ext cx="9326880" cy="292608"/>
-          </a:xfrm>
-          <a:prstGeom prst="rect">
-            <a:avLst/>
-          </a:prstGeom>
-          <a:noFill/>
-        </p:spPr>
-        <p:txBody>
-          <a:bodyPr wrap="square" anchor="t">
-            <a:spAutoFit/>
-          </a:bodyPr>
-          <a:lstStyle/>
-          <a:p>
-            <a:pPr algn="l"/>
-            <a:r>
-              <a:rPr sz="1800" b="1">
-                <a:solidFill>
-                  <a:srgbClr val="FFFFFF"/>
-                </a:solidFill>
-                <a:latin typeface="Aptos"/>
-              </a:rPr>
-              <a:t>Step 4: Recover access with the security-question flow when needed</a:t>
-            </a:r>
-          </a:p>
-        </p:txBody>
-      </p:sp>
-      <p:sp>
-        <p:nvSpPr>
-          <p:cNvPr id="5" name="TextBox 4"/>
-          <p:cNvSpPr txBox="1"/>
-          <p:nvPr/>
-        </p:nvSpPr>
-        <p:spPr>
-          <a:xfrm>
-            <a:off x="8503920" y="182880"/>
-            <a:ext cx="3108960" cy="228600"/>
-          </a:xfrm>
-          <a:prstGeom prst="rect">
-            <a:avLst/>
-          </a:prstGeom>
-          <a:noFill/>
-        </p:spPr>
-        <p:txBody>
-          <a:bodyPr wrap="square" anchor="t">
-            <a:spAutoFit/>
-          </a:bodyPr>
-          <a:lstStyle/>
-          <a:p>
-            <a:pPr algn="r"/>
-            <a:r>
-              <a:rPr sz="1100" b="0">
-                <a:solidFill>
-                  <a:srgbClr val="FFFFFF"/>
-                </a:solidFill>
-                <a:latin typeface="Aptos"/>
-              </a:rPr>
-              <a:t>Field Rep Registration and Login</a:t>
-            </a:r>
-          </a:p>
-        </p:txBody>
-      </p:sp>
-      <p:sp>
-        <p:nvSpPr>
-          <p:cNvPr id="6" name="Rounded Rectangle 5"/>
-          <p:cNvSpPr/>
-          <p:nvPr/>
-        </p:nvSpPr>
-        <p:spPr>
-          <a:xfrm>
-            <a:off x="502920" y="914400"/>
-            <a:ext cx="4572000" cy="5212080"/>
-          </a:xfrm>
-          <a:prstGeom prst="roundRect">
-            <a:avLst/>
-          </a:prstGeom>
-          <a:solidFill>
-            <a:srgbClr val="FFFFFF"/>
-          </a:solidFill>
-          <a:ln>
-            <a:solidFill>
-              <a:srgbClr val="E2E8F0"/>
-            </a:solidFill>
-          </a:ln>
-        </p:spPr>
-        <p:style>
-          <a:lnRef idx="1">
-            <a:schemeClr val="accent1"/>
-          </a:lnRef>
-          <a:fillRef idx="3">
-            <a:schemeClr val="accent1"/>
-          </a:fillRef>
-          <a:effectRef idx="2">
-            <a:schemeClr val="accent1"/>
-          </a:effectRef>
-          <a:fontRef idx="minor">
-            <a:schemeClr val="lt1"/>
-          </a:fontRef>
-        </p:style>
-        <p:txBody>
-          <a:bodyPr rtlCol="0" anchor="ctr"/>
-          <a:lstStyle/>
-          <a:p>
-            <a:pPr algn="ctr"/>
-          </a:p>
-        </p:txBody>
-      </p:sp>
-      <p:sp>
-        <p:nvSpPr>
-          <p:cNvPr id="7" name="TextBox 6"/>
-          <p:cNvSpPr txBox="1"/>
-          <p:nvPr/>
-        </p:nvSpPr>
-        <p:spPr>
-          <a:xfrm>
-            <a:off x="749808" y="1097280"/>
-            <a:ext cx="3931920" cy="4754880"/>
-          </a:xfrm>
-          <a:prstGeom prst="rect">
-            <a:avLst/>
-          </a:prstGeom>
-          <a:noFill/>
-        </p:spPr>
-        <p:txBody>
-          <a:bodyPr wrap="square" lIns="0" rIns="0" tIns="0" bIns="0">
-            <a:spAutoFit/>
-          </a:bodyPr>
-          <a:lstStyle/>
-          <a:p>
-            <a:pPr algn="l">
-              <a:spcBef>
-                <a:spcPts val="0"/>
-              </a:spcBef>
-              <a:spcAft>
-                <a:spcPts val="200"/>
-              </a:spcAft>
-            </a:pPr>
-            <a:r>
-              <a:rPr sz="1200" b="1">
-                <a:solidFill>
-                  <a:srgbClr val="14B8A6"/>
-                </a:solidFill>
-                <a:latin typeface="Aptos"/>
-              </a:rPr>
-              <a:t>User action</a:t>
-            </a:r>
-          </a:p>
-          <a:p>
-            <a:pPr algn="l">
-              <a:lnSpc>
-                <a:spcPct val="110000"/>
-              </a:lnSpc>
-              <a:spcBef>
-                <a:spcPts val="0"/>
-              </a:spcBef>
-              <a:spcAft>
-                <a:spcPts val="800"/>
-              </a:spcAft>
-            </a:pPr>
-            <a:r>
-              <a:rPr sz="1200">
-                <a:solidFill>
-                  <a:srgbClr val="102A43"/>
-                </a:solidFill>
-                <a:latin typeface="Aptos"/>
-              </a:rPr>
-              <a:t>Use the `Forgot Password?` link, enter the rep email, answer the configured security question, and continue to the reset-password page.</a:t>
-            </a:r>
-          </a:p>
-          <a:p>
-            <a:pPr algn="l">
-              <a:spcBef>
-                <a:spcPts val="0"/>
-              </a:spcBef>
-              <a:spcAft>
-                <a:spcPts val="200"/>
-              </a:spcAft>
-            </a:pPr>
-            <a:r>
-              <a:rPr sz="1200" b="1">
-                <a:solidFill>
-                  <a:srgbClr val="14B8A6"/>
-                </a:solidFill>
-                <a:latin typeface="Aptos"/>
-              </a:rPr>
-              <a:t>What appears on screen</a:t>
-            </a:r>
-          </a:p>
-          <a:p>
-            <a:pPr algn="l">
-              <a:lnSpc>
-                <a:spcPct val="110000"/>
-              </a:lnSpc>
-              <a:spcBef>
-                <a:spcPts val="0"/>
-              </a:spcBef>
-              <a:spcAft>
-                <a:spcPts val="800"/>
-              </a:spcAft>
-            </a:pPr>
-            <a:r>
-              <a:rPr sz="1200">
-                <a:solidFill>
-                  <a:srgbClr val="102A43"/>
-                </a:solidFill>
-                <a:latin typeface="Aptos"/>
-              </a:rPr>
-              <a:t>A two-stage recovery screen that first asks for the email address, then shows the rep's saved security question and answer field before allowing a reset.</a:t>
-            </a:r>
-          </a:p>
-          <a:p>
-            <a:pPr algn="l">
-              <a:spcBef>
-                <a:spcPts val="0"/>
-              </a:spcBef>
-              <a:spcAft>
-                <a:spcPts val="200"/>
-              </a:spcAft>
-            </a:pPr>
-            <a:r>
-              <a:rPr sz="1200" b="1">
-                <a:solidFill>
-                  <a:srgbClr val="14B8A6"/>
-                </a:solidFill>
-                <a:latin typeface="Aptos"/>
-              </a:rPr>
-              <a:t>Why it matters</a:t>
-            </a:r>
-          </a:p>
-          <a:p>
-            <a:pPr algn="l">
-              <a:lnSpc>
-                <a:spcPct val="110000"/>
-              </a:lnSpc>
-              <a:spcBef>
-                <a:spcPts val="0"/>
-              </a:spcBef>
-              <a:spcAft>
-                <a:spcPts val="800"/>
-              </a:spcAft>
-            </a:pPr>
-            <a:r>
-              <a:rPr sz="1200">
-                <a:solidFill>
-                  <a:srgbClr val="102A43"/>
-                </a:solidFill>
-                <a:latin typeface="Aptos"/>
-              </a:rPr>
-              <a:t>This is the live fallback when a rep remembers their email but not their current password.</a:t>
-            </a:r>
-          </a:p>
-          <a:p>
-            <a:pPr algn="l">
-              <a:spcBef>
-                <a:spcPts val="0"/>
-              </a:spcBef>
-              <a:spcAft>
-                <a:spcPts val="200"/>
-              </a:spcAft>
-            </a:pPr>
-            <a:r>
-              <a:rPr sz="1200" b="1">
-                <a:solidFill>
-                  <a:srgbClr val="14B8A6"/>
-                </a:solidFill>
-                <a:latin typeface="Aptos"/>
-              </a:rPr>
-              <a:t>Expected result</a:t>
-            </a:r>
-          </a:p>
-          <a:p>
-            <a:pPr algn="l">
-              <a:lnSpc>
-                <a:spcPct val="110000"/>
-              </a:lnSpc>
-              <a:spcBef>
-                <a:spcPts val="0"/>
-              </a:spcBef>
-              <a:spcAft>
-                <a:spcPts val="800"/>
-              </a:spcAft>
-            </a:pPr>
-            <a:r>
-              <a:rPr sz="1200">
-                <a:solidFill>
-                  <a:srgbClr val="102A43"/>
-                </a:solidFill>
-                <a:latin typeface="Aptos"/>
-              </a:rPr>
-              <a:t>The rep can reach the reset-password step without staff manually changing credentials.</a:t>
-            </a:r>
-          </a:p>
-          <a:p>
-            <a:pPr algn="l">
-              <a:spcBef>
-                <a:spcPts val="0"/>
-              </a:spcBef>
-              <a:spcAft>
-                <a:spcPts val="200"/>
-              </a:spcAft>
-            </a:pPr>
-            <a:r>
-              <a:rPr sz="1200" b="1">
-                <a:solidFill>
-                  <a:srgbClr val="F97316"/>
-                </a:solidFill>
-                <a:latin typeface="Aptos"/>
-              </a:rPr>
-              <a:t>Trainer note</a:t>
-            </a:r>
-          </a:p>
-          <a:p>
-            <a:pPr algn="l">
-              <a:lnSpc>
-                <a:spcPct val="110000"/>
-              </a:lnSpc>
-              <a:spcBef>
-                <a:spcPts val="0"/>
-              </a:spcBef>
-              <a:spcAft>
-                <a:spcPts val="0"/>
-              </a:spcAft>
-            </a:pPr>
-            <a:r>
-              <a:rPr sz="1100">
-                <a:solidFill>
-                  <a:srgbClr val="52667A"/>
-                </a:solidFill>
-                <a:latin typeface="Aptos"/>
-              </a:rPr>
-              <a:t>Recovery only works if the rep has a security profile and answer configured. If not, the current product tells the user to contact admin.</a:t>
-            </a:r>
-          </a:p>
-        </p:txBody>
-      </p:sp>
-      <p:sp>
-        <p:nvSpPr>
-          <p:cNvPr id="8" name="Rounded Rectangle 7"/>
-          <p:cNvSpPr/>
-          <p:nvPr/>
-        </p:nvSpPr>
-        <p:spPr>
-          <a:xfrm>
-            <a:off x="5303520" y="914400"/>
-            <a:ext cx="6355080" cy="5212080"/>
-          </a:xfrm>
-          <a:prstGeom prst="roundRect">
-            <a:avLst/>
-          </a:prstGeom>
-          <a:solidFill>
-            <a:srgbClr val="FFFFFF"/>
-          </a:solidFill>
-          <a:ln>
-            <a:solidFill>
-              <a:srgbClr val="E2E8F0"/>
-            </a:solidFill>
-          </a:ln>
-        </p:spPr>
-        <p:style>
-          <a:lnRef idx="1">
-            <a:schemeClr val="accent1"/>
-          </a:lnRef>
-          <a:fillRef idx="3">
-            <a:schemeClr val="accent1"/>
-          </a:fillRef>
-          <a:effectRef idx="2">
-            <a:schemeClr val="accent1"/>
-          </a:effectRef>
-          <a:fontRef idx="minor">
-            <a:schemeClr val="lt1"/>
-          </a:fontRef>
-        </p:style>
-        <p:txBody>
-          <a:bodyPr rtlCol="0" anchor="ctr"/>
-          <a:lstStyle/>
-          <a:p>
-            <a:pPr algn="ctr"/>
-          </a:p>
-        </p:txBody>
-      </p:sp>
-      <p:sp>
-        <p:nvSpPr>
-          <p:cNvPr id="9" name="TextBox 8"/>
-          <p:cNvSpPr txBox="1"/>
-          <p:nvPr/>
-        </p:nvSpPr>
-        <p:spPr>
-          <a:xfrm>
-            <a:off x="5577840" y="1097280"/>
-            <a:ext cx="5669280" cy="228600"/>
-          </a:xfrm>
-          <a:prstGeom prst="rect">
-            <a:avLst/>
-          </a:prstGeom>
-          <a:noFill/>
-        </p:spPr>
-        <p:txBody>
-          <a:bodyPr wrap="square" anchor="t">
-            <a:spAutoFit/>
-          </a:bodyPr>
-          <a:lstStyle/>
-          <a:p>
-            <a:pPr algn="l"/>
-            <a:r>
-              <a:rPr sz="1300" b="1">
-                <a:solidFill>
-                  <a:srgbClr val="14B8A6"/>
-                </a:solidFill>
-                <a:latin typeface="Aptos"/>
-              </a:rPr>
-              <a:t>Field-rep recovery screen showing the security-question challenge before password reset.</a:t>
-            </a:r>
-          </a:p>
-        </p:txBody>
-      </p:sp>
-      <p:pic>
-        <p:nvPicPr>
-          <p:cNvPr id="10" name="Picture 9" descr="fieldrep-forgot-password.png"/>
-          <p:cNvPicPr>
-            <a:picLocks noChangeAspect="1"/>
-          </p:cNvPicPr>
-          <p:nvPr/>
-        </p:nvPicPr>
-        <p:blipFill>
-          <a:blip r:embed="rId2"/>
-          <a:stretch>
-            <a:fillRect/>
-          </a:stretch>
-        </p:blipFill>
-        <p:spPr>
-          <a:xfrm>
-            <a:off x="5559552" y="1417320"/>
-            <a:ext cx="5806440" cy="4160520"/>
-          </a:xfrm>
-          <a:prstGeom prst="rect">
-            <a:avLst/>
-          </a:prstGeom>
-        </p:spPr>
-      </p:pic>
-      <p:sp>
-        <p:nvSpPr>
-          <p:cNvPr id="11" name="TextBox 10"/>
-          <p:cNvSpPr txBox="1"/>
-          <p:nvPr/>
-        </p:nvSpPr>
-        <p:spPr>
-          <a:xfrm>
-            <a:off x="5577840" y="5669280"/>
-            <a:ext cx="5623560" cy="320040"/>
-          </a:xfrm>
-          <a:prstGeom prst="rect">
-            <a:avLst/>
-          </a:prstGeom>
-          <a:noFill/>
-        </p:spPr>
-        <p:txBody>
-          <a:bodyPr wrap="square" anchor="t">
-            <a:spAutoFit/>
-          </a:bodyPr>
-          <a:lstStyle/>
-          <a:p>
-            <a:pPr algn="l"/>
-            <a:r>
-              <a:rPr sz="1100" b="0">
-                <a:solidFill>
-                  <a:srgbClr val="52667A"/>
-                </a:solidFill>
-                <a:latin typeface="Aptos"/>
-              </a:rPr>
-              <a:t>The recovery path that bridges from forgotten password into reset-password.</a:t>
-            </a:r>
-          </a:p>
-        </p:txBody>
-      </p:sp>
-      <p:sp>
-        <p:nvSpPr>
-          <p:cNvPr id="12" name="TextBox 11"/>
-          <p:cNvSpPr txBox="1"/>
-          <p:nvPr/>
-        </p:nvSpPr>
-        <p:spPr>
-          <a:xfrm>
-            <a:off x="502920" y="6400800"/>
-            <a:ext cx="10972800" cy="182880"/>
-          </a:xfrm>
-          <a:prstGeom prst="rect">
-            <a:avLst/>
-          </a:prstGeom>
-          <a:noFill/>
-        </p:spPr>
-        <p:txBody>
-          <a:bodyPr wrap="square" anchor="t">
-            <a:spAutoFit/>
-          </a:bodyPr>
-          <a:lstStyle/>
-          <a:p>
-            <a:pPr algn="l"/>
-            <a:r>
-              <a:rPr sz="1000" b="0">
-                <a:solidFill>
-                  <a:srgbClr val="52667A"/>
-                </a:solidFill>
-                <a:latin typeface="Aptos"/>
-              </a:rPr>
-              <a:t>Screenshot asset: docs/product-user-flows/assets/field-rep-registration-and-login/fieldrep-forgot-password.png</a:t>
-            </a:r>
-          </a:p>
-        </p:txBody>
-      </p:sp>
-    </p:spTree>
-  </p:cSld>
-  <p:clrMapOvr>
-    <a:masterClrMapping/>
-  </p:clrMapOvr>
-</p:sld>
-</file>
-
-<file path=ppt/slides/slide7.xml><?xml version="1.0" encoding="utf-8"?>
-<p:sld xmlns:a="http://schemas.openxmlformats.org/drawingml/2006/main" xmlns:p="http://schemas.openxmlformats.org/presentationml/2006/main" xmlns:r="http://schemas.openxmlformats.org/officeDocument/2006/relationships">
-  <p:cSld>
-    <p:bg>
-      <p:bgPr>
-        <a:solidFill>
-          <a:srgbClr val="F7F8FA"/>
-        </a:solidFill>
-        <a:effectLst/>
-      </p:bgPr>
-    </p:bg>
-    <p:spTree>
-      <p:nvGrpSpPr>
-        <p:cNvPr id="1" name=""/>
-        <p:cNvGrpSpPr/>
-        <p:nvPr/>
-      </p:nvGrpSpPr>
-      <p:grpSpPr/>
-      <p:sp>
-        <p:nvSpPr>
-          <p:cNvPr id="2" name="Rectangle 1"/>
-          <p:cNvSpPr/>
-          <p:nvPr/>
-        </p:nvSpPr>
-        <p:spPr>
-          <a:xfrm>
-            <a:off x="0" y="0"/>
-            <a:ext cx="12191695" cy="594360"/>
-          </a:xfrm>
-          <a:prstGeom prst="rect">
-            <a:avLst/>
-          </a:prstGeom>
-          <a:solidFill>
-            <a:srgbClr val="0B1F33"/>
-          </a:solidFill>
-          <a:ln>
-            <a:solidFill>
-              <a:srgbClr val="0B1F33"/>
-            </a:solidFill>
-          </a:ln>
-        </p:spPr>
-        <p:style>
-          <a:lnRef idx="1">
-            <a:schemeClr val="accent1"/>
-          </a:lnRef>
-          <a:fillRef idx="3">
-            <a:schemeClr val="accent1"/>
-          </a:fillRef>
-          <a:effectRef idx="2">
-            <a:schemeClr val="accent1"/>
-          </a:effectRef>
-          <a:fontRef idx="minor">
-            <a:schemeClr val="lt1"/>
-          </a:fontRef>
-        </p:style>
-        <p:txBody>
-          <a:bodyPr rtlCol="0" anchor="ctr"/>
-          <a:lstStyle/>
-          <a:p>
-            <a:pPr algn="ctr"/>
-          </a:p>
-        </p:txBody>
-      </p:sp>
-      <p:sp>
-        <p:nvSpPr>
-          <p:cNvPr id="3" name="Rectangle 2"/>
-          <p:cNvSpPr/>
-          <p:nvPr/>
-        </p:nvSpPr>
-        <p:spPr>
-          <a:xfrm>
-            <a:off x="0" y="594360"/>
-            <a:ext cx="1234440" cy="109728"/>
-          </a:xfrm>
-          <a:prstGeom prst="rect">
-            <a:avLst/>
-          </a:prstGeom>
-          <a:solidFill>
-            <a:srgbClr val="F97316"/>
-          </a:solidFill>
-          <a:ln>
-            <a:solidFill>
-              <a:srgbClr val="F97316"/>
-            </a:solidFill>
-          </a:ln>
-        </p:spPr>
-        <p:style>
-          <a:lnRef idx="1">
-            <a:schemeClr val="accent1"/>
-          </a:lnRef>
-          <a:fillRef idx="3">
-            <a:schemeClr val="accent1"/>
-          </a:fillRef>
-          <a:effectRef idx="2">
-            <a:schemeClr val="accent1"/>
-          </a:effectRef>
-          <a:fontRef idx="minor">
-            <a:schemeClr val="lt1"/>
-          </a:fontRef>
-        </p:style>
-        <p:txBody>
-          <a:bodyPr rtlCol="0" anchor="ctr"/>
-          <a:lstStyle/>
-          <a:p>
-            <a:pPr algn="ctr"/>
-          </a:p>
-        </p:txBody>
-      </p:sp>
-      <p:sp>
-        <p:nvSpPr>
-          <p:cNvPr id="4" name="TextBox 3"/>
-          <p:cNvSpPr txBox="1"/>
-          <p:nvPr/>
-        </p:nvSpPr>
-        <p:spPr>
-          <a:xfrm>
-            <a:off x="502920" y="109728"/>
-            <a:ext cx="9326880" cy="292608"/>
-          </a:xfrm>
-          <a:prstGeom prst="rect">
-            <a:avLst/>
-          </a:prstGeom>
-          <a:noFill/>
-        </p:spPr>
-        <p:txBody>
-          <a:bodyPr wrap="square" anchor="t">
-            <a:spAutoFit/>
-          </a:bodyPr>
-          <a:lstStyle/>
-          <a:p>
-            <a:pPr algn="l"/>
-            <a:r>
-              <a:rPr sz="1800" b="1">
-                <a:solidFill>
-                  <a:srgbClr val="FFFFFF"/>
-                </a:solidFill>
-                <a:latin typeface="Aptos"/>
-              </a:rPr>
-              <a:t>Step 5: Use the active Gmail/manual or SSO login path</a:t>
-            </a:r>
-          </a:p>
-        </p:txBody>
-      </p:sp>
-      <p:sp>
-        <p:nvSpPr>
-          <p:cNvPr id="5" name="TextBox 4"/>
-          <p:cNvSpPr txBox="1"/>
-          <p:nvPr/>
-        </p:nvSpPr>
-        <p:spPr>
-          <a:xfrm>
-            <a:off x="8503920" y="182880"/>
-            <a:ext cx="3108960" cy="228600"/>
-          </a:xfrm>
-          <a:prstGeom prst="rect">
-            <a:avLst/>
-          </a:prstGeom>
-          <a:noFill/>
-        </p:spPr>
-        <p:txBody>
-          <a:bodyPr wrap="square" anchor="t">
-            <a:spAutoFit/>
-          </a:bodyPr>
-          <a:lstStyle/>
-          <a:p>
-            <a:pPr algn="r"/>
-            <a:r>
-              <a:rPr sz="1100" b="0">
-                <a:solidFill>
-                  <a:srgbClr val="FFFFFF"/>
-                </a:solidFill>
-                <a:latin typeface="Aptos"/>
-              </a:rPr>
-              <a:t>Field Rep Registration and Login</a:t>
-            </a:r>
-          </a:p>
-        </p:txBody>
-      </p:sp>
-      <p:sp>
-        <p:nvSpPr>
-          <p:cNvPr id="6" name="Rounded Rectangle 5"/>
-          <p:cNvSpPr/>
-          <p:nvPr/>
-        </p:nvSpPr>
-        <p:spPr>
-          <a:xfrm>
-            <a:off x="502920" y="914400"/>
-            <a:ext cx="4572000" cy="5212080"/>
-          </a:xfrm>
-          <a:prstGeom prst="roundRect">
-            <a:avLst/>
-          </a:prstGeom>
-          <a:solidFill>
-            <a:srgbClr val="FFFFFF"/>
-          </a:solidFill>
-          <a:ln>
-            <a:solidFill>
-              <a:srgbClr val="E2E8F0"/>
-            </a:solidFill>
-          </a:ln>
-        </p:spPr>
-        <p:style>
-          <a:lnRef idx="1">
-            <a:schemeClr val="accent1"/>
-          </a:lnRef>
-          <a:fillRef idx="3">
-            <a:schemeClr val="accent1"/>
-          </a:fillRef>
-          <a:effectRef idx="2">
-            <a:schemeClr val="accent1"/>
-          </a:effectRef>
-          <a:fontRef idx="minor">
-            <a:schemeClr val="lt1"/>
-          </a:fontRef>
-        </p:style>
-        <p:txBody>
-          <a:bodyPr rtlCol="0" anchor="ctr"/>
-          <a:lstStyle/>
-          <a:p>
-            <a:pPr algn="ctr"/>
-          </a:p>
-        </p:txBody>
-      </p:sp>
-      <p:sp>
-        <p:nvSpPr>
-          <p:cNvPr id="7" name="TextBox 6"/>
-          <p:cNvSpPr txBox="1"/>
-          <p:nvPr/>
-        </p:nvSpPr>
-        <p:spPr>
-          <a:xfrm>
-            <a:off x="749808" y="1097280"/>
-            <a:ext cx="3931920" cy="4754880"/>
-          </a:xfrm>
-          <a:prstGeom prst="rect">
-            <a:avLst/>
-          </a:prstGeom>
-          <a:noFill/>
-        </p:spPr>
-        <p:txBody>
-          <a:bodyPr wrap="square" lIns="0" rIns="0" tIns="0" bIns="0">
-            <a:spAutoFit/>
-          </a:bodyPr>
-          <a:lstStyle/>
-          <a:p>
-            <a:pPr algn="l">
-              <a:spcBef>
-                <a:spcPts val="0"/>
-              </a:spcBef>
-              <a:spcAft>
-                <a:spcPts val="200"/>
-              </a:spcAft>
-            </a:pPr>
-            <a:r>
-              <a:rPr sz="1200" b="1">
-                <a:solidFill>
-                  <a:srgbClr val="14B8A6"/>
-                </a:solidFill>
-                <a:latin typeface="Aptos"/>
-              </a:rPr>
-              <a:t>User action</a:t>
-            </a:r>
-          </a:p>
-          <a:p>
-            <a:pPr algn="l">
-              <a:lnSpc>
-                <a:spcPct val="110000"/>
-              </a:lnSpc>
-              <a:spcBef>
-                <a:spcPts val="0"/>
-              </a:spcBef>
-              <a:spcAft>
-                <a:spcPts val="800"/>
-              </a:spcAft>
-            </a:pPr>
-            <a:r>
-              <a:rPr sz="1100">
-                <a:solidFill>
-                  <a:srgbClr val="102A43"/>
-                </a:solidFill>
-                <a:latin typeface="Aptos"/>
-              </a:rPr>
-              <a:t>Open the Gmail login route and either enter the Brand Specific Field ID plus Email ID manually or arrive through a signed SSO link that provides those values automatically.</a:t>
-            </a:r>
-          </a:p>
-          <a:p>
-            <a:pPr algn="l">
-              <a:spcBef>
-                <a:spcPts val="0"/>
-              </a:spcBef>
-              <a:spcAft>
-                <a:spcPts val="200"/>
-              </a:spcAft>
-            </a:pPr>
-            <a:r>
-              <a:rPr sz="1200" b="1">
-                <a:solidFill>
-                  <a:srgbClr val="14B8A6"/>
-                </a:solidFill>
-                <a:latin typeface="Aptos"/>
-              </a:rPr>
-              <a:t>What appears on screen</a:t>
-            </a:r>
-          </a:p>
-          <a:p>
-            <a:pPr algn="l">
-              <a:lnSpc>
-                <a:spcPct val="110000"/>
-              </a:lnSpc>
-              <a:spcBef>
-                <a:spcPts val="0"/>
-              </a:spcBef>
-              <a:spcAft>
-                <a:spcPts val="800"/>
-              </a:spcAft>
-            </a:pPr>
-            <a:r>
-              <a:rPr sz="1100">
-                <a:solidFill>
-                  <a:srgbClr val="102A43"/>
-                </a:solidFill>
-                <a:latin typeface="Aptos"/>
-              </a:rPr>
-              <a:t>A campaign-scoped login form labeled Brand Specific Field ID and Email ID, along with the campaign context and the floating support chatbot.</a:t>
-            </a:r>
-          </a:p>
-          <a:p>
-            <a:pPr algn="l">
-              <a:spcBef>
-                <a:spcPts val="0"/>
-              </a:spcBef>
-              <a:spcAft>
-                <a:spcPts val="200"/>
-              </a:spcAft>
-            </a:pPr>
-            <a:r>
-              <a:rPr sz="1200" b="1">
-                <a:solidFill>
-                  <a:srgbClr val="14B8A6"/>
-                </a:solidFill>
-                <a:latin typeface="Aptos"/>
-              </a:rPr>
-              <a:t>Why it matters</a:t>
-            </a:r>
-          </a:p>
-          <a:p>
-            <a:pPr algn="l">
-              <a:lnSpc>
-                <a:spcPct val="110000"/>
-              </a:lnSpc>
-              <a:spcBef>
-                <a:spcPts val="0"/>
-              </a:spcBef>
-              <a:spcAft>
-                <a:spcPts val="800"/>
-              </a:spcAft>
-            </a:pPr>
-            <a:r>
-              <a:rPr sz="1100">
-                <a:solidFill>
-                  <a:srgbClr val="102A43"/>
-                </a:solidFill>
-                <a:latin typeface="Aptos"/>
-              </a:rPr>
-              <a:t>This is the primary live access route into the share experience and the path used by the seeded demo.</a:t>
-            </a:r>
-          </a:p>
-          <a:p>
-            <a:pPr algn="l">
-              <a:spcBef>
-                <a:spcPts val="0"/>
-              </a:spcBef>
-              <a:spcAft>
-                <a:spcPts val="200"/>
-              </a:spcAft>
-            </a:pPr>
-            <a:r>
-              <a:rPr sz="1200" b="1">
-                <a:solidFill>
-                  <a:srgbClr val="14B8A6"/>
-                </a:solidFill>
-                <a:latin typeface="Aptos"/>
-              </a:rPr>
-              <a:t>Expected result</a:t>
-            </a:r>
-          </a:p>
-          <a:p>
-            <a:pPr algn="l">
-              <a:lnSpc>
-                <a:spcPct val="110000"/>
-              </a:lnSpc>
-              <a:spcBef>
-                <a:spcPts val="0"/>
-              </a:spcBef>
-              <a:spcAft>
-                <a:spcPts val="800"/>
-              </a:spcAft>
-            </a:pPr>
-            <a:r>
-              <a:rPr sz="1100">
-                <a:solidFill>
-                  <a:srgbClr val="102A43"/>
-                </a:solidFill>
-                <a:latin typeface="Aptos"/>
-              </a:rPr>
-              <a:t>The rep reaches the campaign share page with the correct assignment and session context.</a:t>
-            </a:r>
-          </a:p>
-          <a:p>
-            <a:pPr algn="l">
-              <a:spcBef>
-                <a:spcPts val="0"/>
-              </a:spcBef>
-              <a:spcAft>
-                <a:spcPts val="200"/>
-              </a:spcAft>
-            </a:pPr>
-            <a:r>
-              <a:rPr sz="1200" b="1">
-                <a:solidFill>
-                  <a:srgbClr val="F97316"/>
-                </a:solidFill>
-                <a:latin typeface="Aptos"/>
-              </a:rPr>
-              <a:t>Trainer note</a:t>
-            </a:r>
-          </a:p>
-          <a:p>
-            <a:pPr algn="l">
-              <a:lnSpc>
-                <a:spcPct val="110000"/>
-              </a:lnSpc>
-              <a:spcBef>
-                <a:spcPts val="0"/>
-              </a:spcBef>
-              <a:spcAft>
-                <a:spcPts val="0"/>
-              </a:spcAft>
-            </a:pPr>
-            <a:r>
-              <a:rPr sz="1100">
-                <a:solidFill>
-                  <a:srgbClr val="52667A"/>
-                </a:solidFill>
-                <a:latin typeface="Aptos"/>
-              </a:rPr>
-              <a:t>Manual login uses the brand-specific Field ID. Automatic SSO trusts the master Field Rep ID from the URL or JWT claims, then completes the same login path only if the claim set matches the campaign and rep identifiers in the request.</a:t>
-            </a:r>
-          </a:p>
-        </p:txBody>
-      </p:sp>
-      <p:sp>
-        <p:nvSpPr>
-          <p:cNvPr id="8" name="Rounded Rectangle 7"/>
-          <p:cNvSpPr/>
-          <p:nvPr/>
-        </p:nvSpPr>
-        <p:spPr>
-          <a:xfrm>
-            <a:off x="5303520" y="914400"/>
-            <a:ext cx="6355080" cy="5212080"/>
-          </a:xfrm>
-          <a:prstGeom prst="roundRect">
-            <a:avLst/>
-          </a:prstGeom>
-          <a:solidFill>
-            <a:srgbClr val="FFFFFF"/>
-          </a:solidFill>
-          <a:ln>
-            <a:solidFill>
-              <a:srgbClr val="E2E8F0"/>
-            </a:solidFill>
-          </a:ln>
-        </p:spPr>
-        <p:style>
-          <a:lnRef idx="1">
-            <a:schemeClr val="accent1"/>
-          </a:lnRef>
-          <a:fillRef idx="3">
-            <a:schemeClr val="accent1"/>
-          </a:fillRef>
-          <a:effectRef idx="2">
-            <a:schemeClr val="accent1"/>
-          </a:effectRef>
-          <a:fontRef idx="minor">
-            <a:schemeClr val="lt1"/>
-          </a:fontRef>
-        </p:style>
-        <p:txBody>
-          <a:bodyPr rtlCol="0" anchor="ctr"/>
-          <a:lstStyle/>
-          <a:p>
-            <a:pPr algn="ctr"/>
-          </a:p>
-        </p:txBody>
-      </p:sp>
-      <p:sp>
-        <p:nvSpPr>
-          <p:cNvPr id="9" name="TextBox 8"/>
-          <p:cNvSpPr txBox="1"/>
-          <p:nvPr/>
-        </p:nvSpPr>
-        <p:spPr>
-          <a:xfrm>
-            <a:off x="5577840" y="1097280"/>
-            <a:ext cx="5669280" cy="228600"/>
-          </a:xfrm>
-          <a:prstGeom prst="rect">
-            <a:avLst/>
-          </a:prstGeom>
-          <a:noFill/>
-        </p:spPr>
-        <p:txBody>
-          <a:bodyPr wrap="square" anchor="t">
-            <a:spAutoFit/>
-          </a:bodyPr>
-          <a:lstStyle/>
-          <a:p>
-            <a:pPr algn="l"/>
-            <a:r>
-              <a:rPr sz="1300" b="1">
-                <a:solidFill>
-                  <a:srgbClr val="14B8A6"/>
-                </a:solidFill>
-                <a:latin typeface="Aptos"/>
-              </a:rPr>
-              <a:t>Current Gmail/manual login page used for campaign-scoped rep access.</a:t>
-            </a:r>
-          </a:p>
-        </p:txBody>
-      </p:sp>
-      <p:pic>
-        <p:nvPicPr>
-          <p:cNvPr id="10" name="Picture 9" descr="fieldrep-gmail-login.png"/>
-          <p:cNvPicPr>
-            <a:picLocks noChangeAspect="1"/>
-          </p:cNvPicPr>
-          <p:nvPr/>
-        </p:nvPicPr>
-        <p:blipFill>
-          <a:blip r:embed="rId2"/>
-          <a:stretch>
-            <a:fillRect/>
-          </a:stretch>
-        </p:blipFill>
-        <p:spPr>
-          <a:xfrm>
-            <a:off x="5559552" y="1417320"/>
-            <a:ext cx="5806440" cy="4160520"/>
-          </a:xfrm>
-          <a:prstGeom prst="rect">
-            <a:avLst/>
-          </a:prstGeom>
-        </p:spPr>
-      </p:pic>
-      <p:sp>
-        <p:nvSpPr>
-          <p:cNvPr id="11" name="TextBox 10"/>
-          <p:cNvSpPr txBox="1"/>
-          <p:nvPr/>
-        </p:nvSpPr>
-        <p:spPr>
-          <a:xfrm>
-            <a:off x="5577840" y="5669280"/>
-            <a:ext cx="5623560" cy="320040"/>
-          </a:xfrm>
-          <a:prstGeom prst="rect">
-            <a:avLst/>
-          </a:prstGeom>
-          <a:noFill/>
-        </p:spPr>
-        <p:txBody>
-          <a:bodyPr wrap="square" anchor="t">
-            <a:spAutoFit/>
-          </a:bodyPr>
-          <a:lstStyle/>
-          <a:p>
-            <a:pPr algn="l"/>
-            <a:r>
-              <a:rPr sz="1100" b="0">
-                <a:solidFill>
-                  <a:srgbClr val="52667A"/>
-                </a:solidFill>
-                <a:latin typeface="Aptos"/>
-              </a:rPr>
-              <a:t>The Brand Specific Field ID and Email ID fields that lead directly into the share experience.</a:t>
-            </a:r>
-          </a:p>
-        </p:txBody>
-      </p:sp>
-      <p:sp>
-        <p:nvSpPr>
-          <p:cNvPr id="12" name="TextBox 11"/>
-          <p:cNvSpPr txBox="1"/>
-          <p:nvPr/>
-        </p:nvSpPr>
-        <p:spPr>
-          <a:xfrm>
-            <a:off x="502920" y="6400800"/>
-            <a:ext cx="10972800" cy="182880"/>
-          </a:xfrm>
-          <a:prstGeom prst="rect">
-            <a:avLst/>
-          </a:prstGeom>
-          <a:noFill/>
-        </p:spPr>
-        <p:txBody>
-          <a:bodyPr wrap="square" anchor="t">
-            <a:spAutoFit/>
-          </a:bodyPr>
-          <a:lstStyle/>
-          <a:p>
-            <a:pPr algn="l"/>
-            <a:r>
-              <a:rPr sz="1000" b="0">
-                <a:solidFill>
-                  <a:srgbClr val="52667A"/>
-                </a:solidFill>
-                <a:latin typeface="Aptos"/>
-              </a:rPr>
-              <a:t>Screenshot asset: docs/product-user-flows/assets/field-rep-registration-and-login/fieldrep-gmail-login.png</a:t>
-            </a:r>
-          </a:p>
-        </p:txBody>
-      </p:sp>
-    </p:spTree>
-  </p:cSld>
-  <p:clrMapOvr>
-    <a:masterClrMapping/>
-  </p:clrMapOvr>
-</p:sld>
-</file>
-
-<file path=ppt/slides/slide8.xml><?xml version="1.0" encoding="utf-8"?>
-<p:sld xmlns:a="http://schemas.openxmlformats.org/drawingml/2006/main" xmlns:p="http://schemas.openxmlformats.org/presentationml/2006/main" xmlns:r="http://schemas.openxmlformats.org/officeDocument/2006/relationships">
-  <p:cSld>
-    <p:bg>
-      <p:bgPr>
-        <a:solidFill>
-          <a:srgbClr val="F7F8FA"/>
-        </a:solidFill>
-        <a:effectLst/>
-      </p:bgPr>
-    </p:bg>
-    <p:spTree>
-      <p:nvGrpSpPr>
-        <p:cNvPr id="1" name=""/>
-        <p:cNvGrpSpPr/>
-        <p:nvPr/>
-      </p:nvGrpSpPr>
-      <p:grpSpPr/>
-      <p:sp>
-        <p:nvSpPr>
-          <p:cNvPr id="2" name="Rectangle 1"/>
-          <p:cNvSpPr/>
-          <p:nvPr/>
-        </p:nvSpPr>
-        <p:spPr>
-          <a:xfrm>
-            <a:off x="0" y="0"/>
-            <a:ext cx="12191695" cy="594360"/>
-          </a:xfrm>
-          <a:prstGeom prst="rect">
-            <a:avLst/>
-          </a:prstGeom>
-          <a:solidFill>
-            <a:srgbClr val="0B1F33"/>
-          </a:solidFill>
-          <a:ln>
-            <a:solidFill>
-              <a:srgbClr val="0B1F33"/>
-            </a:solidFill>
-          </a:ln>
-        </p:spPr>
-        <p:style>
-          <a:lnRef idx="1">
-            <a:schemeClr val="accent1"/>
-          </a:lnRef>
-          <a:fillRef idx="3">
-            <a:schemeClr val="accent1"/>
-          </a:fillRef>
-          <a:effectRef idx="2">
-            <a:schemeClr val="accent1"/>
-          </a:effectRef>
-          <a:fontRef idx="minor">
-            <a:schemeClr val="lt1"/>
-          </a:fontRef>
-        </p:style>
-        <p:txBody>
-          <a:bodyPr rtlCol="0" anchor="ctr"/>
-          <a:lstStyle/>
-          <a:p>
-            <a:pPr algn="ctr"/>
-          </a:p>
-        </p:txBody>
-      </p:sp>
-      <p:sp>
-        <p:nvSpPr>
-          <p:cNvPr id="3" name="Rectangle 2"/>
-          <p:cNvSpPr/>
-          <p:nvPr/>
-        </p:nvSpPr>
-        <p:spPr>
-          <a:xfrm>
-            <a:off x="0" y="594360"/>
-            <a:ext cx="1234440" cy="109728"/>
-          </a:xfrm>
-          <a:prstGeom prst="rect">
-            <a:avLst/>
-          </a:prstGeom>
-          <a:solidFill>
-            <a:srgbClr val="F97316"/>
-          </a:solidFill>
-          <a:ln>
-            <a:solidFill>
-              <a:srgbClr val="F97316"/>
-            </a:solidFill>
-          </a:ln>
-        </p:spPr>
-        <p:style>
-          <a:lnRef idx="1">
-            <a:schemeClr val="accent1"/>
-          </a:lnRef>
-          <a:fillRef idx="3">
-            <a:schemeClr val="accent1"/>
-          </a:fillRef>
-          <a:effectRef idx="2">
-            <a:schemeClr val="accent1"/>
-          </a:effectRef>
-          <a:fontRef idx="minor">
-            <a:schemeClr val="lt1"/>
-          </a:fontRef>
-        </p:style>
-        <p:txBody>
-          <a:bodyPr rtlCol="0" anchor="ctr"/>
-          <a:lstStyle/>
-          <a:p>
-            <a:pPr algn="ctr"/>
-          </a:p>
-        </p:txBody>
-      </p:sp>
-      <p:sp>
-        <p:nvSpPr>
-          <p:cNvPr id="4" name="TextBox 3"/>
-          <p:cNvSpPr txBox="1"/>
-          <p:nvPr/>
-        </p:nvSpPr>
-        <p:spPr>
-          <a:xfrm>
-            <a:off x="502920" y="109728"/>
-            <a:ext cx="9326880" cy="292608"/>
-          </a:xfrm>
-          <a:prstGeom prst="rect">
-            <a:avLst/>
-          </a:prstGeom>
-          <a:noFill/>
-        </p:spPr>
-        <p:txBody>
-          <a:bodyPr wrap="square" anchor="t">
-            <a:spAutoFit/>
-          </a:bodyPr>
-          <a:lstStyle/>
-          <a:p>
-            <a:pPr algn="l"/>
-            <a:r>
-              <a:rPr sz="2600" b="1">
-                <a:solidFill>
-                  <a:srgbClr val="FFFFFF"/>
-                </a:solidFill>
-                <a:latin typeface="Aptos"/>
-              </a:rPr>
-              <a:t>Trainer Tips</a:t>
-            </a:r>
-          </a:p>
-        </p:txBody>
-      </p:sp>
-      <p:sp>
-        <p:nvSpPr>
-          <p:cNvPr id="5" name="TextBox 4"/>
-          <p:cNvSpPr txBox="1"/>
-          <p:nvPr/>
-        </p:nvSpPr>
-        <p:spPr>
-          <a:xfrm>
-            <a:off x="8503920" y="182880"/>
-            <a:ext cx="3108960" cy="228600"/>
-          </a:xfrm>
-          <a:prstGeom prst="rect">
-            <a:avLst/>
-          </a:prstGeom>
-          <a:noFill/>
-        </p:spPr>
-        <p:txBody>
-          <a:bodyPr wrap="square" anchor="t">
-            <a:spAutoFit/>
-          </a:bodyPr>
-          <a:lstStyle/>
-          <a:p>
-            <a:pPr algn="r"/>
-            <a:r>
-              <a:rPr sz="1100" b="0">
-                <a:solidFill>
-                  <a:srgbClr val="FFFFFF"/>
-                </a:solidFill>
-                <a:latin typeface="Aptos"/>
-              </a:rPr>
-              <a:t>Field Rep Registration and Login</a:t>
-            </a:r>
-          </a:p>
-        </p:txBody>
-      </p:sp>
-      <p:sp>
-        <p:nvSpPr>
-          <p:cNvPr id="6" name="Rounded Rectangle 5"/>
-          <p:cNvSpPr/>
-          <p:nvPr/>
-        </p:nvSpPr>
-        <p:spPr>
-          <a:xfrm>
-            <a:off x="640080" y="1188720"/>
-            <a:ext cx="10972800" cy="4389120"/>
-          </a:xfrm>
-          <a:prstGeom prst="roundRect">
-            <a:avLst/>
-          </a:prstGeom>
-          <a:solidFill>
-            <a:srgbClr val="FFFFFF"/>
-          </a:solidFill>
-          <a:ln>
-            <a:solidFill>
-              <a:srgbClr val="E2E8F0"/>
-            </a:solidFill>
-          </a:ln>
-        </p:spPr>
-        <p:style>
-          <a:lnRef idx="1">
-            <a:schemeClr val="accent1"/>
-          </a:lnRef>
-          <a:fillRef idx="3">
-            <a:schemeClr val="accent1"/>
-          </a:fillRef>
-          <a:effectRef idx="2">
-            <a:schemeClr val="accent1"/>
-          </a:effectRef>
-          <a:fontRef idx="minor">
-            <a:schemeClr val="lt1"/>
-          </a:fontRef>
-        </p:style>
-        <p:txBody>
-          <a:bodyPr rtlCol="0" anchor="ctr"/>
-          <a:lstStyle/>
-          <a:p>
-            <a:pPr algn="ctr"/>
-          </a:p>
-        </p:txBody>
-      </p:sp>
-      <p:sp>
-        <p:nvSpPr>
-          <p:cNvPr id="7" name="TextBox 6"/>
-          <p:cNvSpPr txBox="1"/>
-          <p:nvPr/>
-        </p:nvSpPr>
-        <p:spPr>
-          <a:xfrm>
-            <a:off x="914400" y="1463040"/>
-            <a:ext cx="2286000" cy="274320"/>
-          </a:xfrm>
-          <a:prstGeom prst="rect">
-            <a:avLst/>
-          </a:prstGeom>
-          <a:noFill/>
-        </p:spPr>
-        <p:txBody>
-          <a:bodyPr wrap="square" anchor="t">
-            <a:spAutoFit/>
-          </a:bodyPr>
-          <a:lstStyle/>
-          <a:p>
-            <a:pPr algn="l"/>
-            <a:r>
-              <a:rPr sz="1400" b="1">
-                <a:solidFill>
-                  <a:srgbClr val="14B8A6"/>
-                </a:solidFill>
-                <a:latin typeface="Aptos"/>
-              </a:rPr>
-              <a:t>Facilitation notes</a:t>
-            </a:r>
-          </a:p>
-        </p:txBody>
-      </p:sp>
-      <p:sp>
-        <p:nvSpPr>
-          <p:cNvPr id="8" name="TextBox 7"/>
-          <p:cNvSpPr txBox="1"/>
-          <p:nvPr/>
-        </p:nvSpPr>
-        <p:spPr>
-          <a:xfrm>
-            <a:off x="914400" y="1828800"/>
-            <a:ext cx="10241280" cy="3017520"/>
-          </a:xfrm>
-          <a:prstGeom prst="rect">
-            <a:avLst/>
-          </a:prstGeom>
-          <a:noFill/>
-        </p:spPr>
-        <p:txBody>
-          <a:bodyPr wrap="square">
-            <a:spAutoFit/>
-          </a:bodyPr>
-          <a:lstStyle/>
-          <a:p>
-            <a:pPr algn="l"/>
-            <a:r>
-              <a:rPr sz="2200">
-                <a:solidFill>
-                  <a:srgbClr val="102A43"/>
-                </a:solidFill>
-                <a:latin typeface="Aptos"/>
-              </a:rPr>
-              <a:t>Lead with the Gmail/manual screen because it reflects the current launch path most accurately.</a:t>
-            </a:r>
-          </a:p>
-          <a:p>
-            <a:pPr algn="l"/>
-            <a:r>
-              <a:rPr sz="2200">
-                <a:solidFill>
-                  <a:srgbClr val="102A43"/>
-                </a:solidFill>
-                <a:latin typeface="Aptos"/>
-              </a:rPr>
-              <a:t>Show the forgot-password screen only briefly unless the session is specifically about support or rep onboarding recovery.</a:t>
-            </a:r>
-          </a:p>
-          <a:p>
-            <a:pPr algn="l"/>
-            <a:r>
-              <a:rPr sz="2200">
-                <a:solidFill>
-                  <a:srgbClr val="102A43"/>
-                </a:solidFill>
-                <a:latin typeface="Aptos"/>
-              </a:rPr>
-              <a:t>Keep the rep deck practical: explain the legacy redirects once, then spend the rest of the time on the live login and share flow.</a:t>
-            </a:r>
-          </a:p>
-        </p:txBody>
-      </p:sp>
-      <p:sp>
-        <p:nvSpPr>
-          <p:cNvPr id="9" name="TextBox 8"/>
-          <p:cNvSpPr txBox="1"/>
-          <p:nvPr/>
-        </p:nvSpPr>
-        <p:spPr>
-          <a:xfrm>
-            <a:off x="914400" y="5257800"/>
-            <a:ext cx="10058400" cy="365760"/>
-          </a:xfrm>
-          <a:prstGeom prst="rect">
-            <a:avLst/>
-          </a:prstGeom>
-          <a:noFill/>
-        </p:spPr>
-        <p:txBody>
-          <a:bodyPr wrap="square" anchor="t">
-            <a:spAutoFit/>
-          </a:bodyPr>
-          <a:lstStyle/>
-          <a:p>
-            <a:pPr algn="l"/>
-            <a:r>
-              <a:rPr sz="1100" b="0">
-                <a:solidFill>
-                  <a:srgbClr val="52667A"/>
-                </a:solidFill>
-                <a:latin typeface="Aptos"/>
-              </a:rPr>
-              <a:t>Related documents: docs/product-user-flows/07-field-rep-sharing-and-doctor-bulk-upload.md, backend/sharing_management/views.py, backend/sharing_management/templates/sharing_management/fieldrep_gmail_login.html</a:t>
-            </a:r>
-          </a:p>
-        </p:txBody>
-      </p:sp>
-      <p:sp>
-        <p:nvSpPr>
-          <p:cNvPr id="10" name="TextBox 9"/>
-          <p:cNvSpPr txBox="1"/>
-          <p:nvPr/>
-        </p:nvSpPr>
-        <p:spPr>
-          <a:xfrm>
-            <a:off x="502920" y="6400800"/>
-            <a:ext cx="10972800" cy="182880"/>
-          </a:xfrm>
-          <a:prstGeom prst="rect">
-            <a:avLst/>
-          </a:prstGeom>
-          <a:noFill/>
-        </p:spPr>
-        <p:txBody>
-          <a:bodyPr wrap="square" anchor="t">
-            <a:spAutoFit/>
-          </a:bodyPr>
-          <a:lstStyle/>
-          <a:p>
-            <a:pPr algn="l"/>
-            <a:r>
-              <a:rPr sz="1000" b="0">
-                <a:solidFill>
-                  <a:srgbClr val="52667A"/>
-                </a:solidFill>
-                <a:latin typeface="Aptos"/>
-              </a:rPr>
-              <a:t>Validated against the current public rep-access screens on 2026-04-23; legacy registration routes now documented as redirects into Gmail/manual login.</a:t>
-            </a:r>
-          </a:p>
-        </p:txBody>
-      </p:sp>
-    </p:spTree>
-  </p:cSld>
-  <p:clrMapOvr>
-    <a:masterClrMapping/>
-  </p:clrMapOvr>
-</p:sld>
-</file>
-
-<file path=ppt/slides/slide9.xml><?xml version="1.0" encoding="utf-8"?>
 <p:sld xmlns:a="http://schemas.openxmlformats.org/drawingml/2006/main" xmlns:p="http://schemas.openxmlformats.org/presentationml/2006/main" xmlns:r="http://schemas.openxmlformats.org/officeDocument/2006/relationships">
   <p:cSld>
     <p:bg>
@@ -7887,7 +5953,7 @@
                 </a:solidFill>
                 <a:latin typeface="Aptos"/>
               </a:rPr>
-              <a:t>Trainees understand that registration and create-password routes are now compatibility redirects, not live onboarding forms.</a:t>
+              <a:t>Trainees understand that registration happens in the campaign manager or staff-admin workflow, not on the public rep page.</a:t>
             </a:r>
           </a:p>
           <a:p>
@@ -7899,7 +5965,7 @@
                 </a:solidFill>
                 <a:latin typeface="Aptos"/>
               </a:rPr>
-              <a:t>The difference between email/password, password recovery, Gmail/manual login, and signed SSO is explained clearly.</a:t>
+              <a:t>The live public login uses only Email ID and Brand Specific Field ID.</a:t>
             </a:r>
           </a:p>
           <a:p>
@@ -8038,6 +6104,18 @@
                 </a:solidFill>
                 <a:latin typeface="Aptos"/>
               </a:rPr>
+              <a:t>Review docs/product-user-flows/04-admin-field-rep-and-doctor-management.md</a:t>
+            </a:r>
+          </a:p>
+          <a:p>
+            <a:pPr algn="l"/>
+            <a:r>
+              <a:rPr sz="1800">
+                <a:solidFill>
+                  <a:srgbClr val="FFFFFF"/>
+                </a:solidFill>
+                <a:latin typeface="Aptos"/>
+              </a:rPr>
               <a:t>Review docs/product-user-flows/07-field-rep-sharing-and-doctor-bulk-upload.md</a:t>
             </a:r>
           </a:p>
@@ -8051,18 +6129,6 @@
                 <a:latin typeface="Aptos"/>
               </a:rPr>
               <a:t>Review backend/sharing_management/views.py</a:t>
-            </a:r>
-          </a:p>
-          <a:p>
-            <a:pPr algn="l"/>
-            <a:r>
-              <a:rPr sz="1800">
-                <a:solidFill>
-                  <a:srgbClr val="FFFFFF"/>
-                </a:solidFill>
-                <a:latin typeface="Aptos"/>
-              </a:rPr>
-              <a:t>Review backend/sharing_management/templates/sharing_management/fieldrep_gmail_login.html</a:t>
             </a:r>
           </a:p>
         </p:txBody>
@@ -8097,7 +6163,7 @@
                 </a:solidFill>
                 <a:latin typeface="Aptos"/>
               </a:rPr>
-              <a:t>Validated against the current public rep-access screens on 2026-04-23; legacy registration routes now documented as redirects into Gmail/manual login.</a:t>
+              <a:t>Validated against the current public Field Rep login screen on 2026-04-23; registration is documented in the admin workflow instead of the public rep deck.</a:t>
             </a:r>
           </a:p>
         </p:txBody>
